--- a/slides/modules/m04-config-multienv.pptx
+++ b/slides/modules/m04-config-multienv.pptx
@@ -14,6 +14,7 @@
     <p:sldId id="262" r:id="rId14"/>
     <p:sldId id="263" r:id="rId15"/>
     <p:sldId id="264" r:id="rId16"/>
+    <p:sldId id="265" r:id="rId17"/>
   </p:sldIdLst>
   <p:sldSz cx="12191695" cy="6858000" type="screen4x3"/>
   <p:notesSz cx="6858000" cy="9144000"/>
@@ -1001,6 +1002,76 @@
           <a:p>
             <a:r>
               <a:t>Land the transfer and stay honest. Discussion prompts: where configuration really lives for one of your services; who can read the production database password today; how much of your stage-to-prod difference is diffable config versus drift. Then the credibility close — externalization is a strong default but every tool over-applies: dozens of env vars need a file or config service, a Secret is not encryption, and a two-setting app does not need a base and three overlays. Reach for the machinery when the environments and change rate justify it.</a:t>
+            </a:r>
+          </a:p>
+        </p:txBody>
+      </p:sp>
+      <p:sp>
+        <p:nvSpPr>
+          <p:cNvPr id="4" name="Slide Number Placeholder 3"/>
+          <p:cNvSpPr>
+            <a:spLocks noGrp="1"/>
+          </p:cNvSpPr>
+          <p:nvPr>
+            <p:ph type="sldNum" idx="5" sz="quarter"/>
+          </p:nvPr>
+        </p:nvSpPr>
+        <p:spPr/>
+      </p:sp>
+    </p:spTree>
+  </p:cSld>
+  <p:clrMapOvr>
+    <a:masterClrMapping/>
+  </p:clrMapOvr>
+</p:notes>
+</file>
+
+<file path=ppt/notesSlides/notesSlide9.xml><?xml version="1.0" encoding="utf-8"?>
+<p:notes xmlns:a="http://schemas.openxmlformats.org/drawingml/2006/main" xmlns:p="http://schemas.openxmlformats.org/presentationml/2006/main" xmlns:r="http://schemas.openxmlformats.org/officeDocument/2006/relationships">
+  <p:cSld>
+    <p:spTree>
+      <p:nvGrpSpPr>
+        <p:cNvPr id="1" name=""/>
+        <p:cNvGrpSpPr/>
+        <p:nvPr/>
+      </p:nvGrpSpPr>
+      <p:grpSpPr>
+        <a:xfrm>
+          <a:off x="0" y="0"/>
+          <a:ext cx="0" cy="0"/>
+          <a:chOff x="0" y="0"/>
+          <a:chExt cx="0" cy="0"/>
+        </a:xfrm>
+      </p:grpSpPr>
+      <p:sp>
+        <p:nvSpPr>
+          <p:cNvPr id="2" name="Slide Image Placeholder 1"/>
+          <p:cNvSpPr>
+            <a:spLocks noGrp="1"/>
+          </p:cNvSpPr>
+          <p:nvPr>
+            <p:ph type="sldImg" idx="2"/>
+          </p:nvPr>
+        </p:nvSpPr>
+        <p:spPr/>
+      </p:sp>
+      <p:sp>
+        <p:nvSpPr>
+          <p:cNvPr id="3" name="Notes Placeholder 2"/>
+          <p:cNvSpPr>
+            <a:spLocks noGrp="1"/>
+          </p:cNvSpPr>
+          <p:nvPr>
+            <p:ph type="body" idx="3" sz="quarter"/>
+          </p:nvPr>
+        </p:nvSpPr>
+        <p:spPr/>
+        <p:txBody>
+          <a:bodyPr/>
+          <a:lstStyle/>
+          <a:p>
+            <a:r>
+              <a:t>Concept diagram: What you built.</a:t>
             </a:r>
           </a:p>
         </p:txBody>
@@ -4209,6 +4280,372 @@
 </p:sld>
 </file>
 
+<file path=ppt/slides/slide10.xml><?xml version="1.0" encoding="utf-8"?>
+<p:sld xmlns:a="http://schemas.openxmlformats.org/drawingml/2006/main" xmlns:p="http://schemas.openxmlformats.org/presentationml/2006/main" xmlns:r="http://schemas.openxmlformats.org/officeDocument/2006/relationships">
+  <p:cSld>
+    <p:spTree>
+      <p:nvGrpSpPr>
+        <p:cNvPr id="1" name=""/>
+        <p:cNvGrpSpPr/>
+        <p:nvPr/>
+      </p:nvGrpSpPr>
+      <p:grpSpPr/>
+      <p:pic>
+        <p:nvPicPr>
+          <p:cNvPr id="2" name="Picture 1" descr="redhat_logo.jpg"/>
+          <p:cNvPicPr>
+            <a:picLocks noChangeAspect="1"/>
+          </p:cNvPicPr>
+          <p:nvPr/>
+        </p:nvPicPr>
+        <p:blipFill>
+          <a:blip r:embed="rId2"/>
+          <a:stretch>
+            <a:fillRect/>
+          </a:stretch>
+        </p:blipFill>
+        <p:spPr>
+          <a:xfrm>
+            <a:off x="10326319" y="475488"/>
+            <a:ext cx="1024128" cy="242248"/>
+          </a:xfrm>
+          <a:prstGeom prst="rect">
+            <a:avLst/>
+          </a:prstGeom>
+        </p:spPr>
+      </p:pic>
+      <p:sp>
+        <p:nvSpPr>
+          <p:cNvPr id="3" name="TextBox 2"/>
+          <p:cNvSpPr txBox="1"/>
+          <p:nvPr/>
+        </p:nvSpPr>
+        <p:spPr>
+          <a:xfrm>
+            <a:off x="841248" y="548640"/>
+            <a:ext cx="8595360" cy="274320"/>
+          </a:xfrm>
+          <a:prstGeom prst="rect">
+            <a:avLst/>
+          </a:prstGeom>
+          <a:noFill/>
+        </p:spPr>
+        <p:txBody>
+          <a:bodyPr wrap="square" anchor="t" lIns="0" rIns="0" tIns="0" bIns="0">
+            <a:spAutoFit/>
+          </a:bodyPr>
+          <a:lstStyle/>
+          <a:p>
+            <a:pPr algn="l">
+              <a:lnSpc>
+                <a:spcPct val="106000"/>
+              </a:lnSpc>
+              <a:spcBef>
+                <a:spcPts val="0"/>
+              </a:spcBef>
+              <a:spcAft>
+                <a:spcPts val="0"/>
+              </a:spcAft>
+            </a:pPr>
+            <a:r>
+              <a:rPr sz="1250" b="1" spc="220">
+                <a:solidFill>
+                  <a:srgbClr val="EE0000"/>
+                </a:solidFill>
+                <a:latin typeface="Red Hat Display"/>
+              </a:rPr>
+              <a:t>M04 · CONFIG, SECRETS &amp; MULTI-ENVIRONMENT</a:t>
+            </a:r>
+          </a:p>
+        </p:txBody>
+      </p:sp>
+      <p:sp>
+        <p:nvSpPr>
+          <p:cNvPr id="4" name="TextBox 3"/>
+          <p:cNvSpPr txBox="1"/>
+          <p:nvPr/>
+        </p:nvSpPr>
+        <p:spPr>
+          <a:xfrm>
+            <a:off x="841248" y="877824"/>
+            <a:ext cx="10515600" cy="548640"/>
+          </a:xfrm>
+          <a:prstGeom prst="rect">
+            <a:avLst/>
+          </a:prstGeom>
+          <a:noFill/>
+        </p:spPr>
+        <p:txBody>
+          <a:bodyPr wrap="none" anchor="t" lIns="0" rIns="0" tIns="0" bIns="0">
+            <a:spAutoFit/>
+          </a:bodyPr>
+          <a:lstStyle/>
+          <a:p>
+            <a:pPr algn="l">
+              <a:lnSpc>
+                <a:spcPct val="100000"/>
+              </a:lnSpc>
+              <a:spcBef>
+                <a:spcPts val="0"/>
+              </a:spcBef>
+              <a:spcAft>
+                <a:spcPts val="0"/>
+              </a:spcAft>
+            </a:pPr>
+            <a:r>
+              <a:rPr sz="2500" b="1">
+                <a:solidFill>
+                  <a:srgbClr val="1A1A1A"/>
+                </a:solidFill>
+                <a:latin typeface="Red Hat Display"/>
+              </a:rPr>
+              <a:t>What you built</a:t>
+            </a:r>
+          </a:p>
+        </p:txBody>
+      </p:sp>
+      <p:cxnSp>
+        <p:nvCxnSpPr>
+          <p:cNvPr id="5" name="Connector 4"/>
+          <p:cNvCxnSpPr/>
+          <p:nvPr/>
+        </p:nvCxnSpPr>
+        <p:spPr>
+          <a:xfrm>
+            <a:off x="841248" y="1554480"/>
+            <a:ext cx="1371600" cy="0"/>
+          </a:xfrm>
+          <a:prstGeom prst="bentConnector3">
+            <a:avLst/>
+          </a:prstGeom>
+          <a:ln w="31750">
+            <a:solidFill>
+              <a:srgbClr val="EE0000"/>
+            </a:solidFill>
+          </a:ln>
+          <a:effectLst/>
+        </p:spPr>
+        <p:style>
+          <a:lnRef idx="2">
+            <a:schemeClr val="accent1"/>
+          </a:lnRef>
+          <a:fillRef idx="0">
+            <a:schemeClr val="accent1"/>
+          </a:fillRef>
+          <a:effectRef idx="1">
+            <a:schemeClr val="accent1"/>
+          </a:effectRef>
+          <a:fontRef idx="minor">
+            <a:schemeClr val="tx1"/>
+          </a:fontRef>
+        </p:style>
+      </p:cxnSp>
+      <p:sp>
+        <p:nvSpPr>
+          <p:cNvPr id="6" name="Rounded Rectangle 5"/>
+          <p:cNvSpPr/>
+          <p:nvPr/>
+        </p:nvSpPr>
+        <p:spPr>
+          <a:xfrm>
+            <a:off x="841248" y="2331720"/>
+            <a:ext cx="10509199" cy="3794760"/>
+          </a:xfrm>
+          <a:prstGeom prst="roundRect">
+            <a:avLst>
+              <a:gd name="adj" fmla="val 4000"/>
+            </a:avLst>
+          </a:prstGeom>
+          <a:solidFill>
+            <a:srgbClr val="FFFFFF"/>
+          </a:solidFill>
+          <a:ln w="15240">
+            <a:solidFill>
+              <a:srgbClr val="DDE1E6"/>
+            </a:solidFill>
+          </a:ln>
+          <a:effectLst/>
+        </p:spPr>
+        <p:style>
+          <a:lnRef idx="1">
+            <a:schemeClr val="accent1"/>
+          </a:lnRef>
+          <a:fillRef idx="3">
+            <a:schemeClr val="accent1"/>
+          </a:fillRef>
+          <a:effectRef idx="2">
+            <a:schemeClr val="accent1"/>
+          </a:effectRef>
+          <a:fontRef idx="minor">
+            <a:schemeClr val="lt1"/>
+          </a:fontRef>
+        </p:style>
+        <p:txBody>
+          <a:bodyPr rtlCol="0" anchor="ctr"/>
+          <a:lstStyle/>
+          <a:p>
+            <a:pPr algn="ctr"/>
+          </a:p>
+        </p:txBody>
+      </p:sp>
+      <p:pic>
+        <p:nvPicPr>
+          <p:cNvPr id="7" name="Picture 6" descr="05-what-you-built.png"/>
+          <p:cNvPicPr>
+            <a:picLocks noChangeAspect="1"/>
+          </p:cNvPicPr>
+          <p:nvPr/>
+        </p:nvPicPr>
+        <p:blipFill>
+          <a:blip r:embed="rId3"/>
+          <a:stretch>
+            <a:fillRect/>
+          </a:stretch>
+        </p:blipFill>
+        <p:spPr>
+          <a:xfrm>
+            <a:off x="1042416" y="2545675"/>
+            <a:ext cx="10106863" cy="3366848"/>
+          </a:xfrm>
+          <a:prstGeom prst="rect">
+            <a:avLst/>
+          </a:prstGeom>
+        </p:spPr>
+      </p:pic>
+      <p:cxnSp>
+        <p:nvCxnSpPr>
+          <p:cNvPr id="8" name="Connector 7"/>
+          <p:cNvCxnSpPr/>
+          <p:nvPr/>
+        </p:nvCxnSpPr>
+        <p:spPr>
+          <a:xfrm>
+            <a:off x="841248" y="6437376"/>
+            <a:ext cx="10509199" cy="0"/>
+          </a:xfrm>
+          <a:prstGeom prst="bentConnector3">
+            <a:avLst/>
+          </a:prstGeom>
+          <a:ln w="12700">
+            <a:solidFill>
+              <a:srgbClr val="DDE1E6"/>
+            </a:solidFill>
+          </a:ln>
+          <a:effectLst/>
+        </p:spPr>
+        <p:style>
+          <a:lnRef idx="2">
+            <a:schemeClr val="accent1"/>
+          </a:lnRef>
+          <a:fillRef idx="0">
+            <a:schemeClr val="accent1"/>
+          </a:fillRef>
+          <a:effectRef idx="1">
+            <a:schemeClr val="accent1"/>
+          </a:effectRef>
+          <a:fontRef idx="minor">
+            <a:schemeClr val="tx1"/>
+          </a:fontRef>
+        </p:style>
+      </p:cxnSp>
+      <p:sp>
+        <p:nvSpPr>
+          <p:cNvPr id="9" name="TextBox 8"/>
+          <p:cNvSpPr txBox="1"/>
+          <p:nvPr/>
+        </p:nvSpPr>
+        <p:spPr>
+          <a:xfrm>
+            <a:off x="841248" y="6473952"/>
+            <a:ext cx="7315200" cy="274320"/>
+          </a:xfrm>
+          <a:prstGeom prst="rect">
+            <a:avLst/>
+          </a:prstGeom>
+          <a:noFill/>
+        </p:spPr>
+        <p:txBody>
+          <a:bodyPr wrap="square" anchor="t" lIns="0" rIns="0" tIns="0" bIns="0">
+            <a:spAutoFit/>
+          </a:bodyPr>
+          <a:lstStyle/>
+          <a:p>
+            <a:pPr algn="l">
+              <a:lnSpc>
+                <a:spcPct val="106000"/>
+              </a:lnSpc>
+              <a:spcBef>
+                <a:spcPts val="0"/>
+              </a:spcBef>
+              <a:spcAft>
+                <a:spcPts val="0"/>
+              </a:spcAft>
+            </a:pPr>
+            <a:r>
+              <a:rPr sz="950" b="0">
+                <a:solidFill>
+                  <a:srgbClr val="8A9099"/>
+                </a:solidFill>
+                <a:latin typeface="Red Hat Text"/>
+              </a:rPr>
+              <a:t>CONFIDENTIAL</a:t>
+            </a:r>
+          </a:p>
+        </p:txBody>
+      </p:sp>
+      <p:sp>
+        <p:nvSpPr>
+          <p:cNvPr id="10" name="TextBox 9"/>
+          <p:cNvSpPr txBox="1"/>
+          <p:nvPr/>
+        </p:nvSpPr>
+        <p:spPr>
+          <a:xfrm>
+            <a:off x="10801807" y="6473952"/>
+            <a:ext cx="548640" cy="274320"/>
+          </a:xfrm>
+          <a:prstGeom prst="rect">
+            <a:avLst/>
+          </a:prstGeom>
+          <a:noFill/>
+        </p:spPr>
+        <p:txBody>
+          <a:bodyPr wrap="square" anchor="t" lIns="0" rIns="0" tIns="0" bIns="0">
+            <a:spAutoFit/>
+          </a:bodyPr>
+          <a:lstStyle/>
+          <a:p>
+            <a:pPr algn="r">
+              <a:lnSpc>
+                <a:spcPct val="106000"/>
+              </a:lnSpc>
+              <a:spcBef>
+                <a:spcPts val="0"/>
+              </a:spcBef>
+              <a:spcAft>
+                <a:spcPts val="0"/>
+              </a:spcAft>
+            </a:pPr>
+            <a:r>
+              <a:rPr sz="950" b="0">
+                <a:solidFill>
+                  <a:srgbClr val="8A9099"/>
+                </a:solidFill>
+                <a:latin typeface="Red Hat Text"/>
+              </a:rPr>
+              <a:t>9</a:t>
+            </a:r>
+          </a:p>
+        </p:txBody>
+      </p:sp>
+    </p:spTree>
+  </p:cSld>
+  <p:clrMapOvr>
+    <a:masterClrMapping/>
+  </p:clrMapOvr>
+</p:sld>
+</file>
+
 <file path=ppt/slides/slide2.xml><?xml version="1.0" encoding="utf-8"?>
 <p:sld xmlns:a="http://schemas.openxmlformats.org/drawingml/2006/main" xmlns:p="http://schemas.openxmlformats.org/presentationml/2006/main" xmlns:r="http://schemas.openxmlformats.org/officeDocument/2006/relationships">
   <p:cSld>
@@ -4378,11 +4815,11 @@
         <p:spPr>
           <a:xfrm>
             <a:off x="841248" y="2395728"/>
-            <a:ext cx="5715000" cy="530352"/>
+            <a:ext cx="5138928" cy="786384"/>
           </a:xfrm>
           <a:prstGeom prst="roundRect">
             <a:avLst>
-              <a:gd name="adj" fmla="val 6000"/>
+              <a:gd name="adj" fmla="val 7000"/>
             </a:avLst>
           </a:prstGeom>
           <a:solidFill>
@@ -4417,9 +4854,55 @@
           </a:p>
         </p:txBody>
       </p:sp>
+      <p:sp>
+        <p:nvSpPr>
+          <p:cNvPr id="7" name="Rounded Rectangle 6"/>
+          <p:cNvSpPr/>
+          <p:nvPr/>
+        </p:nvSpPr>
+        <p:spPr>
+          <a:xfrm>
+            <a:off x="987552" y="2532888"/>
+            <a:ext cx="512064" cy="512064"/>
+          </a:xfrm>
+          <a:prstGeom prst="roundRect">
+            <a:avLst>
+              <a:gd name="adj" fmla="val 26000"/>
+            </a:avLst>
+          </a:prstGeom>
+          <a:solidFill>
+            <a:srgbClr val="EE0000"/>
+          </a:solidFill>
+          <a:ln>
+            <a:noFill/>
+          </a:ln>
+          <a:effectLst/>
+        </p:spPr>
+        <p:style>
+          <a:lnRef idx="1">
+            <a:schemeClr val="accent1"/>
+          </a:lnRef>
+          <a:fillRef idx="3">
+            <a:schemeClr val="accent1"/>
+          </a:fillRef>
+          <a:effectRef idx="2">
+            <a:schemeClr val="accent1"/>
+          </a:effectRef>
+          <a:fontRef idx="minor">
+            <a:schemeClr val="lt1"/>
+          </a:fontRef>
+        </p:style>
+        <p:txBody>
+          <a:bodyPr rtlCol="0" anchor="ctr"/>
+          <a:lstStyle/>
+          <a:p>
+            <a:pPr algn="ctr"/>
+          </a:p>
+        </p:txBody>
+      </p:sp>
       <p:pic>
         <p:nvPicPr>
-          <p:cNvPr id="7" name="Picture 6" descr="check_steel.png"/>
+          <p:cNvPr id="8" name="Picture 7" descr="check_white.png"/>
           <p:cNvPicPr>
             <a:picLocks noChangeAspect="1"/>
           </p:cNvPicPr>
@@ -4433,8 +4916,8 @@
         </p:blipFill>
         <p:spPr>
           <a:xfrm>
-            <a:off x="987552" y="2542032"/>
-            <a:ext cx="237744" cy="237744"/>
+            <a:off x="1110447" y="2655783"/>
+            <a:ext cx="266273" cy="266273"/>
           </a:xfrm>
           <a:prstGeom prst="rect">
             <a:avLst/>
@@ -4443,14 +4926,14 @@
       </p:pic>
       <p:sp>
         <p:nvSpPr>
-          <p:cNvPr id="8" name="TextBox 7"/>
+          <p:cNvPr id="9" name="TextBox 8"/>
           <p:cNvSpPr txBox="1"/>
           <p:nvPr/>
         </p:nvSpPr>
         <p:spPr>
           <a:xfrm>
-            <a:off x="1353312" y="2395728"/>
-            <a:ext cx="5029200" cy="530352"/>
+            <a:off x="1627632" y="2395728"/>
+            <a:ext cx="4206240" cy="786384"/>
           </a:xfrm>
           <a:prstGeom prst="rect">
             <a:avLst/>
@@ -4475,7 +4958,7 @@
               </a:spcAft>
             </a:pPr>
             <a:r>
-              <a:rPr sz="1200" b="0">
+              <a:rPr sz="1150" b="0">
                 <a:solidFill>
                   <a:srgbClr val="1A1A1A"/>
                 </a:solidFill>
@@ -4488,18 +4971,18 @@
       </p:sp>
       <p:sp>
         <p:nvSpPr>
-          <p:cNvPr id="9" name="Rounded Rectangle 8"/>
+          <p:cNvPr id="10" name="Rounded Rectangle 9"/>
           <p:cNvSpPr/>
           <p:nvPr/>
         </p:nvSpPr>
         <p:spPr>
           <a:xfrm>
-            <a:off x="841248" y="2999232"/>
-            <a:ext cx="5715000" cy="530352"/>
+            <a:off x="6254496" y="2395728"/>
+            <a:ext cx="5138928" cy="786384"/>
           </a:xfrm>
           <a:prstGeom prst="roundRect">
             <a:avLst>
-              <a:gd name="adj" fmla="val 6000"/>
+              <a:gd name="adj" fmla="val 7000"/>
             </a:avLst>
           </a:prstGeom>
           <a:solidFill>
@@ -4534,9 +5017,55 @@
           </a:p>
         </p:txBody>
       </p:sp>
+      <p:sp>
+        <p:nvSpPr>
+          <p:cNvPr id="11" name="Rounded Rectangle 10"/>
+          <p:cNvSpPr/>
+          <p:nvPr/>
+        </p:nvSpPr>
+        <p:spPr>
+          <a:xfrm>
+            <a:off x="6400800" y="2532888"/>
+            <a:ext cx="512064" cy="512064"/>
+          </a:xfrm>
+          <a:prstGeom prst="roundRect">
+            <a:avLst>
+              <a:gd name="adj" fmla="val 26000"/>
+            </a:avLst>
+          </a:prstGeom>
+          <a:solidFill>
+            <a:srgbClr val="EE0000"/>
+          </a:solidFill>
+          <a:ln>
+            <a:noFill/>
+          </a:ln>
+          <a:effectLst/>
+        </p:spPr>
+        <p:style>
+          <a:lnRef idx="1">
+            <a:schemeClr val="accent1"/>
+          </a:lnRef>
+          <a:fillRef idx="3">
+            <a:schemeClr val="accent1"/>
+          </a:fillRef>
+          <a:effectRef idx="2">
+            <a:schemeClr val="accent1"/>
+          </a:effectRef>
+          <a:fontRef idx="minor">
+            <a:schemeClr val="lt1"/>
+          </a:fontRef>
+        </p:style>
+        <p:txBody>
+          <a:bodyPr rtlCol="0" anchor="ctr"/>
+          <a:lstStyle/>
+          <a:p>
+            <a:pPr algn="ctr"/>
+          </a:p>
+        </p:txBody>
+      </p:sp>
       <p:pic>
         <p:nvPicPr>
-          <p:cNvPr id="10" name="Picture 9" descr="check_steel.png"/>
+          <p:cNvPr id="12" name="Picture 11" descr="check_white.png"/>
           <p:cNvPicPr>
             <a:picLocks noChangeAspect="1"/>
           </p:cNvPicPr>
@@ -4550,8 +5079,8 @@
         </p:blipFill>
         <p:spPr>
           <a:xfrm>
-            <a:off x="987552" y="3145536"/>
-            <a:ext cx="237744" cy="237744"/>
+            <a:off x="6523695" y="2655783"/>
+            <a:ext cx="266273" cy="266273"/>
           </a:xfrm>
           <a:prstGeom prst="rect">
             <a:avLst/>
@@ -4560,14 +5089,14 @@
       </p:pic>
       <p:sp>
         <p:nvSpPr>
-          <p:cNvPr id="11" name="TextBox 10"/>
+          <p:cNvPr id="13" name="TextBox 12"/>
           <p:cNvSpPr txBox="1"/>
           <p:nvPr/>
         </p:nvSpPr>
         <p:spPr>
           <a:xfrm>
-            <a:off x="1353312" y="2999232"/>
-            <a:ext cx="5029200" cy="530352"/>
+            <a:off x="7040880" y="2395728"/>
+            <a:ext cx="4206240" cy="786384"/>
           </a:xfrm>
           <a:prstGeom prst="rect">
             <a:avLst/>
@@ -4592,7 +5121,7 @@
               </a:spcAft>
             </a:pPr>
             <a:r>
-              <a:rPr sz="1200" b="0">
+              <a:rPr sz="1150" b="0">
                 <a:solidFill>
                   <a:srgbClr val="1A1A1A"/>
                 </a:solidFill>
@@ -4605,18 +5134,18 @@
       </p:sp>
       <p:sp>
         <p:nvSpPr>
-          <p:cNvPr id="12" name="Rounded Rectangle 11"/>
+          <p:cNvPr id="14" name="Rounded Rectangle 13"/>
           <p:cNvSpPr/>
           <p:nvPr/>
         </p:nvSpPr>
         <p:spPr>
           <a:xfrm>
-            <a:off x="841248" y="3602736"/>
-            <a:ext cx="5715000" cy="530352"/>
+            <a:off x="841248" y="3328416"/>
+            <a:ext cx="5138928" cy="786384"/>
           </a:xfrm>
           <a:prstGeom prst="roundRect">
             <a:avLst>
-              <a:gd name="adj" fmla="val 6000"/>
+              <a:gd name="adj" fmla="val 7000"/>
             </a:avLst>
           </a:prstGeom>
           <a:solidFill>
@@ -4651,9 +5180,55 @@
           </a:p>
         </p:txBody>
       </p:sp>
+      <p:sp>
+        <p:nvSpPr>
+          <p:cNvPr id="15" name="Rounded Rectangle 14"/>
+          <p:cNvSpPr/>
+          <p:nvPr/>
+        </p:nvSpPr>
+        <p:spPr>
+          <a:xfrm>
+            <a:off x="987552" y="3465576"/>
+            <a:ext cx="512064" cy="512064"/>
+          </a:xfrm>
+          <a:prstGeom prst="roundRect">
+            <a:avLst>
+              <a:gd name="adj" fmla="val 26000"/>
+            </a:avLst>
+          </a:prstGeom>
+          <a:solidFill>
+            <a:srgbClr val="EE0000"/>
+          </a:solidFill>
+          <a:ln>
+            <a:noFill/>
+          </a:ln>
+          <a:effectLst/>
+        </p:spPr>
+        <p:style>
+          <a:lnRef idx="1">
+            <a:schemeClr val="accent1"/>
+          </a:lnRef>
+          <a:fillRef idx="3">
+            <a:schemeClr val="accent1"/>
+          </a:fillRef>
+          <a:effectRef idx="2">
+            <a:schemeClr val="accent1"/>
+          </a:effectRef>
+          <a:fontRef idx="minor">
+            <a:schemeClr val="lt1"/>
+          </a:fontRef>
+        </p:style>
+        <p:txBody>
+          <a:bodyPr rtlCol="0" anchor="ctr"/>
+          <a:lstStyle/>
+          <a:p>
+            <a:pPr algn="ctr"/>
+          </a:p>
+        </p:txBody>
+      </p:sp>
       <p:pic>
         <p:nvPicPr>
-          <p:cNvPr id="13" name="Picture 12" descr="check_steel.png"/>
+          <p:cNvPr id="16" name="Picture 15" descr="check_white.png"/>
           <p:cNvPicPr>
             <a:picLocks noChangeAspect="1"/>
           </p:cNvPicPr>
@@ -4667,8 +5242,8 @@
         </p:blipFill>
         <p:spPr>
           <a:xfrm>
-            <a:off x="987552" y="3749040"/>
-            <a:ext cx="237744" cy="237744"/>
+            <a:off x="1110447" y="3588471"/>
+            <a:ext cx="266273" cy="266273"/>
           </a:xfrm>
           <a:prstGeom prst="rect">
             <a:avLst/>
@@ -4677,14 +5252,14 @@
       </p:pic>
       <p:sp>
         <p:nvSpPr>
-          <p:cNvPr id="14" name="TextBox 13"/>
+          <p:cNvPr id="17" name="TextBox 16"/>
           <p:cNvSpPr txBox="1"/>
           <p:nvPr/>
         </p:nvSpPr>
         <p:spPr>
           <a:xfrm>
-            <a:off x="1353312" y="3602736"/>
-            <a:ext cx="5029200" cy="530352"/>
+            <a:off x="1627632" y="3328416"/>
+            <a:ext cx="4206240" cy="786384"/>
           </a:xfrm>
           <a:prstGeom prst="rect">
             <a:avLst/>
@@ -4709,7 +5284,7 @@
               </a:spcAft>
             </a:pPr>
             <a:r>
-              <a:rPr sz="1200" b="0">
+              <a:rPr sz="1150" b="0">
                 <a:solidFill>
                   <a:srgbClr val="1A1A1A"/>
                 </a:solidFill>
@@ -4722,18 +5297,18 @@
       </p:sp>
       <p:sp>
         <p:nvSpPr>
-          <p:cNvPr id="15" name="Rounded Rectangle 14"/>
+          <p:cNvPr id="18" name="Rounded Rectangle 17"/>
           <p:cNvSpPr/>
           <p:nvPr/>
         </p:nvSpPr>
         <p:spPr>
           <a:xfrm>
-            <a:off x="841248" y="4206240"/>
-            <a:ext cx="5715000" cy="530352"/>
+            <a:off x="6254496" y="3328416"/>
+            <a:ext cx="5138928" cy="786384"/>
           </a:xfrm>
           <a:prstGeom prst="roundRect">
             <a:avLst>
-              <a:gd name="adj" fmla="val 6000"/>
+              <a:gd name="adj" fmla="val 7000"/>
             </a:avLst>
           </a:prstGeom>
           <a:solidFill>
@@ -4768,9 +5343,55 @@
           </a:p>
         </p:txBody>
       </p:sp>
+      <p:sp>
+        <p:nvSpPr>
+          <p:cNvPr id="19" name="Rounded Rectangle 18"/>
+          <p:cNvSpPr/>
+          <p:nvPr/>
+        </p:nvSpPr>
+        <p:spPr>
+          <a:xfrm>
+            <a:off x="6400800" y="3465576"/>
+            <a:ext cx="512064" cy="512064"/>
+          </a:xfrm>
+          <a:prstGeom prst="roundRect">
+            <a:avLst>
+              <a:gd name="adj" fmla="val 26000"/>
+            </a:avLst>
+          </a:prstGeom>
+          <a:solidFill>
+            <a:srgbClr val="EE0000"/>
+          </a:solidFill>
+          <a:ln>
+            <a:noFill/>
+          </a:ln>
+          <a:effectLst/>
+        </p:spPr>
+        <p:style>
+          <a:lnRef idx="1">
+            <a:schemeClr val="accent1"/>
+          </a:lnRef>
+          <a:fillRef idx="3">
+            <a:schemeClr val="accent1"/>
+          </a:fillRef>
+          <a:effectRef idx="2">
+            <a:schemeClr val="accent1"/>
+          </a:effectRef>
+          <a:fontRef idx="minor">
+            <a:schemeClr val="lt1"/>
+          </a:fontRef>
+        </p:style>
+        <p:txBody>
+          <a:bodyPr rtlCol="0" anchor="ctr"/>
+          <a:lstStyle/>
+          <a:p>
+            <a:pPr algn="ctr"/>
+          </a:p>
+        </p:txBody>
+      </p:sp>
       <p:pic>
         <p:nvPicPr>
-          <p:cNvPr id="16" name="Picture 15" descr="check_steel.png"/>
+          <p:cNvPr id="20" name="Picture 19" descr="check_white.png"/>
           <p:cNvPicPr>
             <a:picLocks noChangeAspect="1"/>
           </p:cNvPicPr>
@@ -4784,8 +5405,8 @@
         </p:blipFill>
         <p:spPr>
           <a:xfrm>
-            <a:off x="987552" y="4352544"/>
-            <a:ext cx="237744" cy="237744"/>
+            <a:off x="6523695" y="3588471"/>
+            <a:ext cx="266273" cy="266273"/>
           </a:xfrm>
           <a:prstGeom prst="rect">
             <a:avLst/>
@@ -4794,14 +5415,14 @@
       </p:pic>
       <p:sp>
         <p:nvSpPr>
-          <p:cNvPr id="17" name="TextBox 16"/>
+          <p:cNvPr id="21" name="TextBox 20"/>
           <p:cNvSpPr txBox="1"/>
           <p:nvPr/>
         </p:nvSpPr>
         <p:spPr>
           <a:xfrm>
-            <a:off x="1353312" y="4206240"/>
-            <a:ext cx="5029200" cy="530352"/>
+            <a:off x="7040880" y="3328416"/>
+            <a:ext cx="4206240" cy="786384"/>
           </a:xfrm>
           <a:prstGeom prst="rect">
             <a:avLst/>
@@ -4826,7 +5447,7 @@
               </a:spcAft>
             </a:pPr>
             <a:r>
-              <a:rPr sz="1200" b="0">
+              <a:rPr sz="1150" b="0">
                 <a:solidFill>
                   <a:srgbClr val="1A1A1A"/>
                 </a:solidFill>
@@ -4839,18 +5460,18 @@
       </p:sp>
       <p:sp>
         <p:nvSpPr>
-          <p:cNvPr id="18" name="Rounded Rectangle 17"/>
+          <p:cNvPr id="22" name="Rounded Rectangle 21"/>
           <p:cNvSpPr/>
           <p:nvPr/>
         </p:nvSpPr>
         <p:spPr>
           <a:xfrm>
-            <a:off x="841248" y="4809744"/>
-            <a:ext cx="5715000" cy="530352"/>
+            <a:off x="841248" y="4261104"/>
+            <a:ext cx="5138928" cy="786384"/>
           </a:xfrm>
           <a:prstGeom prst="roundRect">
             <a:avLst>
-              <a:gd name="adj" fmla="val 6000"/>
+              <a:gd name="adj" fmla="val 7000"/>
             </a:avLst>
           </a:prstGeom>
           <a:solidFill>
@@ -4885,9 +5506,55 @@
           </a:p>
         </p:txBody>
       </p:sp>
+      <p:sp>
+        <p:nvSpPr>
+          <p:cNvPr id="23" name="Rounded Rectangle 22"/>
+          <p:cNvSpPr/>
+          <p:nvPr/>
+        </p:nvSpPr>
+        <p:spPr>
+          <a:xfrm>
+            <a:off x="987552" y="4398264"/>
+            <a:ext cx="512064" cy="512064"/>
+          </a:xfrm>
+          <a:prstGeom prst="roundRect">
+            <a:avLst>
+              <a:gd name="adj" fmla="val 26000"/>
+            </a:avLst>
+          </a:prstGeom>
+          <a:solidFill>
+            <a:srgbClr val="EE0000"/>
+          </a:solidFill>
+          <a:ln>
+            <a:noFill/>
+          </a:ln>
+          <a:effectLst/>
+        </p:spPr>
+        <p:style>
+          <a:lnRef idx="1">
+            <a:schemeClr val="accent1"/>
+          </a:lnRef>
+          <a:fillRef idx="3">
+            <a:schemeClr val="accent1"/>
+          </a:fillRef>
+          <a:effectRef idx="2">
+            <a:schemeClr val="accent1"/>
+          </a:effectRef>
+          <a:fontRef idx="minor">
+            <a:schemeClr val="lt1"/>
+          </a:fontRef>
+        </p:style>
+        <p:txBody>
+          <a:bodyPr rtlCol="0" anchor="ctr"/>
+          <a:lstStyle/>
+          <a:p>
+            <a:pPr algn="ctr"/>
+          </a:p>
+        </p:txBody>
+      </p:sp>
       <p:pic>
         <p:nvPicPr>
-          <p:cNvPr id="19" name="Picture 18" descr="check_steel.png"/>
+          <p:cNvPr id="24" name="Picture 23" descr="check_white.png"/>
           <p:cNvPicPr>
             <a:picLocks noChangeAspect="1"/>
           </p:cNvPicPr>
@@ -4901,8 +5568,8 @@
         </p:blipFill>
         <p:spPr>
           <a:xfrm>
-            <a:off x="987552" y="4956048"/>
-            <a:ext cx="237744" cy="237744"/>
+            <a:off x="1110447" y="4521159"/>
+            <a:ext cx="266273" cy="266273"/>
           </a:xfrm>
           <a:prstGeom prst="rect">
             <a:avLst/>
@@ -4911,14 +5578,14 @@
       </p:pic>
       <p:sp>
         <p:nvSpPr>
-          <p:cNvPr id="20" name="TextBox 19"/>
+          <p:cNvPr id="25" name="TextBox 24"/>
           <p:cNvSpPr txBox="1"/>
           <p:nvPr/>
         </p:nvSpPr>
         <p:spPr>
           <a:xfrm>
-            <a:off x="1353312" y="4809744"/>
-            <a:ext cx="5029200" cy="530352"/>
+            <a:off x="1627632" y="4261104"/>
+            <a:ext cx="4206240" cy="786384"/>
           </a:xfrm>
           <a:prstGeom prst="rect">
             <a:avLst/>
@@ -4943,221 +5610,13 @@
               </a:spcAft>
             </a:pPr>
             <a:r>
-              <a:rPr sz="1200" b="0">
+              <a:rPr sz="1150" b="0">
                 <a:solidFill>
                   <a:srgbClr val="1A1A1A"/>
                 </a:solidFill>
                 <a:latin typeface="Red Hat Text"/>
               </a:rPr>
               <a:t>And drifted between environments</a:t>
-            </a:r>
-          </a:p>
-        </p:txBody>
-      </p:sp>
-      <p:sp>
-        <p:nvSpPr>
-          <p:cNvPr id="21" name="Rounded Rectangle 20"/>
-          <p:cNvSpPr/>
-          <p:nvPr/>
-        </p:nvSpPr>
-        <p:spPr>
-          <a:xfrm>
-            <a:off x="6812280" y="2395728"/>
-            <a:ext cx="4538167" cy="2944368"/>
-          </a:xfrm>
-          <a:prstGeom prst="roundRect">
-            <a:avLst>
-              <a:gd name="adj" fmla="val 4000"/>
-            </a:avLst>
-          </a:prstGeom>
-          <a:solidFill>
-            <a:srgbClr val="FFFFFF"/>
-          </a:solidFill>
-          <a:ln w="15240">
-            <a:solidFill>
-              <a:srgbClr val="DDE1E6"/>
-            </a:solidFill>
-          </a:ln>
-          <a:effectLst/>
-        </p:spPr>
-        <p:style>
-          <a:lnRef idx="1">
-            <a:schemeClr val="accent1"/>
-          </a:lnRef>
-          <a:fillRef idx="3">
-            <a:schemeClr val="accent1"/>
-          </a:fillRef>
-          <a:effectRef idx="2">
-            <a:schemeClr val="accent1"/>
-          </a:effectRef>
-          <a:fontRef idx="minor">
-            <a:schemeClr val="lt1"/>
-          </a:fontRef>
-        </p:style>
-        <p:txBody>
-          <a:bodyPr rtlCol="0" anchor="ctr"/>
-          <a:lstStyle/>
-          <a:p>
-            <a:pPr algn="ctr"/>
-          </a:p>
-        </p:txBody>
-      </p:sp>
-      <p:sp>
-        <p:nvSpPr>
-          <p:cNvPr id="22" name="Rounded Rectangle 21"/>
-          <p:cNvSpPr/>
-          <p:nvPr/>
-        </p:nvSpPr>
-        <p:spPr>
-          <a:xfrm>
-            <a:off x="7013448" y="2596896"/>
-            <a:ext cx="1298448" cy="310896"/>
-          </a:xfrm>
-          <a:prstGeom prst="roundRect">
-            <a:avLst>
-              <a:gd name="adj" fmla="val 50000"/>
-            </a:avLst>
-          </a:prstGeom>
-          <a:solidFill>
-            <a:srgbClr val="FCECEC"/>
-          </a:solidFill>
-          <a:ln>
-            <a:noFill/>
-          </a:ln>
-          <a:effectLst/>
-        </p:spPr>
-        <p:style>
-          <a:lnRef idx="1">
-            <a:schemeClr val="accent1"/>
-          </a:lnRef>
-          <a:fillRef idx="3">
-            <a:schemeClr val="accent1"/>
-          </a:fillRef>
-          <a:effectRef idx="2">
-            <a:schemeClr val="accent1"/>
-          </a:effectRef>
-          <a:fontRef idx="minor">
-            <a:schemeClr val="lt1"/>
-          </a:fontRef>
-        </p:style>
-        <p:txBody>
-          <a:bodyPr rtlCol="0" anchor="ctr"/>
-          <a:lstStyle/>
-          <a:p>
-            <a:pPr algn="ctr"/>
-          </a:p>
-        </p:txBody>
-      </p:sp>
-      <p:sp>
-        <p:nvSpPr>
-          <p:cNvPr id="23" name="TextBox 22"/>
-          <p:cNvSpPr txBox="1"/>
-          <p:nvPr/>
-        </p:nvSpPr>
-        <p:spPr>
-          <a:xfrm>
-            <a:off x="7013448" y="2596896"/>
-            <a:ext cx="1298448" cy="310896"/>
-          </a:xfrm>
-          <a:prstGeom prst="rect">
-            <a:avLst/>
-          </a:prstGeom>
-          <a:noFill/>
-        </p:spPr>
-        <p:txBody>
-          <a:bodyPr wrap="none" anchor="ctr" lIns="0" rIns="0" tIns="0" bIns="0">
-            <a:spAutoFit/>
-          </a:bodyPr>
-          <a:lstStyle/>
-          <a:p>
-            <a:pPr algn="ctr">
-              <a:lnSpc>
-                <a:spcPct val="106000"/>
-              </a:lnSpc>
-              <a:spcBef>
-                <a:spcPts val="0"/>
-              </a:spcBef>
-              <a:spcAft>
-                <a:spcPts val="0"/>
-              </a:spcAft>
-            </a:pPr>
-            <a:r>
-              <a:rPr sz="850" b="1">
-                <a:solidFill>
-                  <a:srgbClr val="B80000"/>
-                </a:solidFill>
-                <a:latin typeface="Red Hat Display"/>
-              </a:rPr>
-              <a:t>MEDIA PASS</a:t>
-            </a:r>
-          </a:p>
-        </p:txBody>
-      </p:sp>
-      <p:pic>
-        <p:nvPicPr>
-          <p:cNvPr id="24" name="Picture 23" descr="eye_slate.png"/>
-          <p:cNvPicPr>
-            <a:picLocks noChangeAspect="1"/>
-          </p:cNvPicPr>
-          <p:nvPr/>
-        </p:nvPicPr>
-        <p:blipFill>
-          <a:blip r:embed="rId4"/>
-          <a:stretch>
-            <a:fillRect/>
-          </a:stretch>
-        </p:blipFill>
-        <p:spPr>
-          <a:xfrm>
-            <a:off x="8843619" y="3108960"/>
-            <a:ext cx="475488" cy="475488"/>
-          </a:xfrm>
-          <a:prstGeom prst="rect">
-            <a:avLst/>
-          </a:prstGeom>
-        </p:spPr>
-      </p:pic>
-      <p:sp>
-        <p:nvSpPr>
-          <p:cNvPr id="25" name="TextBox 24"/>
-          <p:cNvSpPr txBox="1"/>
-          <p:nvPr/>
-        </p:nvSpPr>
-        <p:spPr>
-          <a:xfrm>
-            <a:off x="7050024" y="3721608"/>
-            <a:ext cx="4062679" cy="1481328"/>
-          </a:xfrm>
-          <a:prstGeom prst="rect">
-            <a:avLst/>
-          </a:prstGeom>
-          <a:noFill/>
-        </p:spPr>
-        <p:txBody>
-          <a:bodyPr wrap="square" anchor="t" lIns="0" rIns="0" tIns="0" bIns="0">
-            <a:spAutoFit/>
-          </a:bodyPr>
-          <a:lstStyle/>
-          <a:p>
-            <a:pPr algn="l">
-              <a:lnSpc>
-                <a:spcPct val="120000"/>
-              </a:lnSpc>
-              <a:spcBef>
-                <a:spcPts val="0"/>
-              </a:spcBef>
-              <a:spcAft>
-                <a:spcPts val="0"/>
-              </a:spcAft>
-            </a:pPr>
-            <a:r>
-              <a:rPr sz="950" b="0">
-                <a:solidFill>
-                  <a:srgbClr val="8A9099"/>
-                </a:solidFill>
-                <a:latin typeface="Red Hat Text"/>
-              </a:rPr>
-              <a:t>Split panel — a green "staging: passed" check next to a red "production: 500" alert, with a tangle of config sources (image, env, file) between them.</a:t>
             </a:r>
           </a:p>
         </p:txBody>
@@ -5465,7 +5924,7 @@
         <p:spPr>
           <a:xfrm>
             <a:off x="841248" y="2395728"/>
-            <a:ext cx="5715000" cy="530352"/>
+            <a:ext cx="4160520" cy="475488"/>
           </a:xfrm>
           <a:prstGeom prst="roundRect">
             <a:avLst>
@@ -5520,8 +5979,8 @@
         </p:blipFill>
         <p:spPr>
           <a:xfrm>
-            <a:off x="987552" y="2542032"/>
-            <a:ext cx="237744" cy="237744"/>
+            <a:off x="969264" y="2532888"/>
+            <a:ext cx="201168" cy="201168"/>
           </a:xfrm>
           <a:prstGeom prst="rect">
             <a:avLst/>
@@ -5536,8 +5995,8 @@
         </p:nvSpPr>
         <p:spPr>
           <a:xfrm>
-            <a:off x="1353312" y="2395728"/>
-            <a:ext cx="5029200" cy="530352"/>
+            <a:off x="1280160" y="2395728"/>
+            <a:ext cx="3593591" cy="475488"/>
           </a:xfrm>
           <a:prstGeom prst="rect">
             <a:avLst/>
@@ -5562,7 +6021,7 @@
               </a:spcAft>
             </a:pPr>
             <a:r>
-              <a:rPr sz="1200" b="0">
+              <a:rPr sz="1050" b="0">
                 <a:solidFill>
                   <a:srgbClr val="1A1A1A"/>
                 </a:solidFill>
@@ -5581,8 +6040,8 @@
         </p:nvSpPr>
         <p:spPr>
           <a:xfrm>
-            <a:off x="841248" y="2999232"/>
-            <a:ext cx="5715000" cy="530352"/>
+            <a:off x="841248" y="2944368"/>
+            <a:ext cx="4160520" cy="475488"/>
           </a:xfrm>
           <a:prstGeom prst="roundRect">
             <a:avLst>
@@ -5637,8 +6096,8 @@
         </p:blipFill>
         <p:spPr>
           <a:xfrm>
-            <a:off x="987552" y="3145536"/>
-            <a:ext cx="237744" cy="237744"/>
+            <a:off x="969264" y="3081528"/>
+            <a:ext cx="201168" cy="201168"/>
           </a:xfrm>
           <a:prstGeom prst="rect">
             <a:avLst/>
@@ -5653,8 +6112,8 @@
         </p:nvSpPr>
         <p:spPr>
           <a:xfrm>
-            <a:off x="1353312" y="2999232"/>
-            <a:ext cx="5029200" cy="530352"/>
+            <a:off x="1280160" y="2944368"/>
+            <a:ext cx="3593591" cy="475488"/>
           </a:xfrm>
           <a:prstGeom prst="rect">
             <a:avLst/>
@@ -5679,7 +6138,7 @@
               </a:spcAft>
             </a:pPr>
             <a:r>
-              <a:rPr sz="1200" b="0">
+              <a:rPr sz="1050" b="0">
                 <a:solidFill>
                   <a:srgbClr val="1A1A1A"/>
                 </a:solidFill>
@@ -5698,8 +6157,8 @@
         </p:nvSpPr>
         <p:spPr>
           <a:xfrm>
-            <a:off x="841248" y="3602736"/>
-            <a:ext cx="5715000" cy="530352"/>
+            <a:off x="841248" y="3493008"/>
+            <a:ext cx="4160520" cy="475488"/>
           </a:xfrm>
           <a:prstGeom prst="roundRect">
             <a:avLst>
@@ -5754,8 +6213,8 @@
         </p:blipFill>
         <p:spPr>
           <a:xfrm>
-            <a:off x="987552" y="3749040"/>
-            <a:ext cx="237744" cy="237744"/>
+            <a:off x="969264" y="3630168"/>
+            <a:ext cx="201168" cy="201168"/>
           </a:xfrm>
           <a:prstGeom prst="rect">
             <a:avLst/>
@@ -5770,8 +6229,8 @@
         </p:nvSpPr>
         <p:spPr>
           <a:xfrm>
-            <a:off x="1353312" y="3602736"/>
-            <a:ext cx="5029200" cy="530352"/>
+            <a:off x="1280160" y="3493008"/>
+            <a:ext cx="3593591" cy="475488"/>
           </a:xfrm>
           <a:prstGeom prst="rect">
             <a:avLst/>
@@ -5796,7 +6255,7 @@
               </a:spcAft>
             </a:pPr>
             <a:r>
-              <a:rPr sz="1200" b="0">
+              <a:rPr sz="1050" b="0">
                 <a:solidFill>
                   <a:srgbClr val="1A1A1A"/>
                 </a:solidFill>
@@ -5815,8 +6274,8 @@
         </p:nvSpPr>
         <p:spPr>
           <a:xfrm>
-            <a:off x="841248" y="4206240"/>
-            <a:ext cx="5715000" cy="530352"/>
+            <a:off x="841248" y="4041648"/>
+            <a:ext cx="4160520" cy="475488"/>
           </a:xfrm>
           <a:prstGeom prst="roundRect">
             <a:avLst>
@@ -5871,8 +6330,8 @@
         </p:blipFill>
         <p:spPr>
           <a:xfrm>
-            <a:off x="987552" y="4352544"/>
-            <a:ext cx="237744" cy="237744"/>
+            <a:off x="969264" y="4178807"/>
+            <a:ext cx="201168" cy="201168"/>
           </a:xfrm>
           <a:prstGeom prst="rect">
             <a:avLst/>
@@ -5887,8 +6346,8 @@
         </p:nvSpPr>
         <p:spPr>
           <a:xfrm>
-            <a:off x="1353312" y="4206240"/>
-            <a:ext cx="5029200" cy="530352"/>
+            <a:off x="1280160" y="4041648"/>
+            <a:ext cx="3593591" cy="475488"/>
           </a:xfrm>
           <a:prstGeom prst="rect">
             <a:avLst/>
@@ -5913,7 +6372,7 @@
               </a:spcAft>
             </a:pPr>
             <a:r>
-              <a:rPr sz="1200" b="0">
+              <a:rPr sz="1050" b="0">
                 <a:solidFill>
                   <a:srgbClr val="1A1A1A"/>
                 </a:solidFill>
@@ -5932,8 +6391,8 @@
         </p:nvSpPr>
         <p:spPr>
           <a:xfrm>
-            <a:off x="841248" y="4809744"/>
-            <a:ext cx="5715000" cy="530352"/>
+            <a:off x="841248" y="4590288"/>
+            <a:ext cx="4160520" cy="475488"/>
           </a:xfrm>
           <a:prstGeom prst="roundRect">
             <a:avLst>
@@ -5988,8 +6447,8 @@
         </p:blipFill>
         <p:spPr>
           <a:xfrm>
-            <a:off x="987552" y="4956048"/>
-            <a:ext cx="237744" cy="237744"/>
+            <a:off x="969264" y="4727447"/>
+            <a:ext cx="201168" cy="201168"/>
           </a:xfrm>
           <a:prstGeom prst="rect">
             <a:avLst/>
@@ -6004,8 +6463,8 @@
         </p:nvSpPr>
         <p:spPr>
           <a:xfrm>
-            <a:off x="1353312" y="4809744"/>
-            <a:ext cx="5029200" cy="530352"/>
+            <a:off x="1280160" y="4590288"/>
+            <a:ext cx="3593591" cy="475488"/>
           </a:xfrm>
           <a:prstGeom prst="rect">
             <a:avLst/>
@@ -6030,7 +6489,7 @@
               </a:spcAft>
             </a:pPr>
             <a:r>
-              <a:rPr sz="1200" b="0">
+              <a:rPr sz="1050" b="0">
                 <a:solidFill>
                   <a:srgbClr val="1A1A1A"/>
                 </a:solidFill>
@@ -6049,8 +6508,8 @@
         </p:nvSpPr>
         <p:spPr>
           <a:xfrm>
-            <a:off x="6812280" y="2395728"/>
-            <a:ext cx="4538167" cy="2944368"/>
+            <a:off x="5385816" y="2395728"/>
+            <a:ext cx="4380677" cy="3657600"/>
           </a:xfrm>
           <a:prstGeom prst="roundRect">
             <a:avLst>
@@ -6089,100 +6548,9 @@
           </a:p>
         </p:txBody>
       </p:sp>
-      <p:sp>
-        <p:nvSpPr>
-          <p:cNvPr id="22" name="Rounded Rectangle 21"/>
-          <p:cNvSpPr/>
-          <p:nvPr/>
-        </p:nvSpPr>
-        <p:spPr>
-          <a:xfrm>
-            <a:off x="7013448" y="2596896"/>
-            <a:ext cx="1298448" cy="310896"/>
-          </a:xfrm>
-          <a:prstGeom prst="roundRect">
-            <a:avLst>
-              <a:gd name="adj" fmla="val 50000"/>
-            </a:avLst>
-          </a:prstGeom>
-          <a:solidFill>
-            <a:srgbClr val="FCECEC"/>
-          </a:solidFill>
-          <a:ln>
-            <a:noFill/>
-          </a:ln>
-          <a:effectLst/>
-        </p:spPr>
-        <p:style>
-          <a:lnRef idx="1">
-            <a:schemeClr val="accent1"/>
-          </a:lnRef>
-          <a:fillRef idx="3">
-            <a:schemeClr val="accent1"/>
-          </a:fillRef>
-          <a:effectRef idx="2">
-            <a:schemeClr val="accent1"/>
-          </a:effectRef>
-          <a:fontRef idx="minor">
-            <a:schemeClr val="lt1"/>
-          </a:fontRef>
-        </p:style>
-        <p:txBody>
-          <a:bodyPr rtlCol="0" anchor="ctr"/>
-          <a:lstStyle/>
-          <a:p>
-            <a:pPr algn="ctr"/>
-          </a:p>
-        </p:txBody>
-      </p:sp>
-      <p:sp>
-        <p:nvSpPr>
-          <p:cNvPr id="23" name="TextBox 22"/>
-          <p:cNvSpPr txBox="1"/>
-          <p:nvPr/>
-        </p:nvSpPr>
-        <p:spPr>
-          <a:xfrm>
-            <a:off x="7013448" y="2596896"/>
-            <a:ext cx="1298448" cy="310896"/>
-          </a:xfrm>
-          <a:prstGeom prst="rect">
-            <a:avLst/>
-          </a:prstGeom>
-          <a:noFill/>
-        </p:spPr>
-        <p:txBody>
-          <a:bodyPr wrap="none" anchor="ctr" lIns="0" rIns="0" tIns="0" bIns="0">
-            <a:spAutoFit/>
-          </a:bodyPr>
-          <a:lstStyle/>
-          <a:p>
-            <a:pPr algn="ctr">
-              <a:lnSpc>
-                <a:spcPct val="106000"/>
-              </a:lnSpc>
-              <a:spcBef>
-                <a:spcPts val="0"/>
-              </a:spcBef>
-              <a:spcAft>
-                <a:spcPts val="0"/>
-              </a:spcAft>
-            </a:pPr>
-            <a:r>
-              <a:rPr sz="850" b="1">
-                <a:solidFill>
-                  <a:srgbClr val="B80000"/>
-                </a:solidFill>
-                <a:latin typeface="Red Hat Display"/>
-              </a:rPr>
-              <a:t>MEDIA PASS</a:t>
-            </a:r>
-          </a:p>
-        </p:txBody>
-      </p:sp>
       <p:pic>
         <p:nvPicPr>
-          <p:cNvPr id="24" name="Picture 23" descr="eye_slate.png"/>
+          <p:cNvPr id="22" name="Picture 21" descr="01-config-sources.png"/>
           <p:cNvPicPr>
             <a:picLocks noChangeAspect="1"/>
           </p:cNvPicPr>
@@ -6196,62 +6564,17 @@
         </p:blipFill>
         <p:spPr>
           <a:xfrm>
-            <a:off x="8843619" y="3108960"/>
-            <a:ext cx="475488" cy="475488"/>
+            <a:off x="5532120" y="2542032"/>
+            <a:ext cx="4088069" cy="3364992"/>
           </a:xfrm>
           <a:prstGeom prst="rect">
             <a:avLst/>
           </a:prstGeom>
         </p:spPr>
       </p:pic>
-      <p:sp>
-        <p:nvSpPr>
-          <p:cNvPr id="25" name="TextBox 24"/>
-          <p:cNvSpPr txBox="1"/>
-          <p:nvPr/>
-        </p:nvSpPr>
-        <p:spPr>
-          <a:xfrm>
-            <a:off x="7050024" y="3721608"/>
-            <a:ext cx="4062679" cy="1481328"/>
-          </a:xfrm>
-          <a:prstGeom prst="rect">
-            <a:avLst/>
-          </a:prstGeom>
-          <a:noFill/>
-        </p:spPr>
-        <p:txBody>
-          <a:bodyPr wrap="square" anchor="t" lIns="0" rIns="0" tIns="0" bIns="0">
-            <a:spAutoFit/>
-          </a:bodyPr>
-          <a:lstStyle/>
-          <a:p>
-            <a:pPr algn="l">
-              <a:lnSpc>
-                <a:spcPct val="120000"/>
-              </a:lnSpc>
-              <a:spcBef>
-                <a:spcPts val="0"/>
-              </a:spcBef>
-              <a:spcAft>
-                <a:spcPts val="0"/>
-              </a:spcAft>
-            </a:pPr>
-            <a:r>
-              <a:rPr sz="950" b="0">
-                <a:solidFill>
-                  <a:srgbClr val="8A9099"/>
-                </a:solidFill>
-                <a:latin typeface="Red Hat Text"/>
-              </a:rPr>
-              <a:t>Reuse concept diagram config-multienv-...-01-config-sources.svg — one immutable image fed by env / ConfigMap / Secret / mounted file.</a:t>
-            </a:r>
-          </a:p>
-        </p:txBody>
-      </p:sp>
       <p:cxnSp>
         <p:nvCxnSpPr>
-          <p:cNvPr id="26" name="Connector 25"/>
+          <p:cNvPr id="23" name="Connector 22"/>
           <p:cNvCxnSpPr/>
           <p:nvPr/>
         </p:nvCxnSpPr>
@@ -6287,7 +6610,7 @@
       </p:cxnSp>
       <p:sp>
         <p:nvSpPr>
-          <p:cNvPr id="27" name="TextBox 26"/>
+          <p:cNvPr id="24" name="TextBox 23"/>
           <p:cNvSpPr txBox="1"/>
           <p:nvPr/>
         </p:nvSpPr>
@@ -6332,7 +6655,7 @@
       </p:sp>
       <p:sp>
         <p:nvSpPr>
-          <p:cNvPr id="28" name="TextBox 27"/>
+          <p:cNvPr id="25" name="TextBox 24"/>
           <p:cNvSpPr txBox="1"/>
           <p:nvPr/>
         </p:nvSpPr>
@@ -6552,11 +6875,11 @@
         <p:spPr>
           <a:xfrm>
             <a:off x="841248" y="2395728"/>
-            <a:ext cx="5715000" cy="530352"/>
+            <a:ext cx="5138928" cy="786384"/>
           </a:xfrm>
           <a:prstGeom prst="roundRect">
             <a:avLst>
-              <a:gd name="adj" fmla="val 6000"/>
+              <a:gd name="adj" fmla="val 7000"/>
             </a:avLst>
           </a:prstGeom>
           <a:solidFill>
@@ -6591,9 +6914,55 @@
           </a:p>
         </p:txBody>
       </p:sp>
+      <p:sp>
+        <p:nvSpPr>
+          <p:cNvPr id="7" name="Rounded Rectangle 6"/>
+          <p:cNvSpPr/>
+          <p:nvPr/>
+        </p:nvSpPr>
+        <p:spPr>
+          <a:xfrm>
+            <a:off x="987552" y="2532888"/>
+            <a:ext cx="512064" cy="512064"/>
+          </a:xfrm>
+          <a:prstGeom prst="roundRect">
+            <a:avLst>
+              <a:gd name="adj" fmla="val 26000"/>
+            </a:avLst>
+          </a:prstGeom>
+          <a:solidFill>
+            <a:srgbClr val="EE0000"/>
+          </a:solidFill>
+          <a:ln>
+            <a:noFill/>
+          </a:ln>
+          <a:effectLst/>
+        </p:spPr>
+        <p:style>
+          <a:lnRef idx="1">
+            <a:schemeClr val="accent1"/>
+          </a:lnRef>
+          <a:fillRef idx="3">
+            <a:schemeClr val="accent1"/>
+          </a:fillRef>
+          <a:effectRef idx="2">
+            <a:schemeClr val="accent1"/>
+          </a:effectRef>
+          <a:fontRef idx="minor">
+            <a:schemeClr val="lt1"/>
+          </a:fontRef>
+        </p:style>
+        <p:txBody>
+          <a:bodyPr rtlCol="0" anchor="ctr"/>
+          <a:lstStyle/>
+          <a:p>
+            <a:pPr algn="ctr"/>
+          </a:p>
+        </p:txBody>
+      </p:sp>
       <p:pic>
         <p:nvPicPr>
-          <p:cNvPr id="7" name="Picture 6" descr="check_steel.png"/>
+          <p:cNvPr id="8" name="Picture 7" descr="check_white.png"/>
           <p:cNvPicPr>
             <a:picLocks noChangeAspect="1"/>
           </p:cNvPicPr>
@@ -6607,8 +6976,8 @@
         </p:blipFill>
         <p:spPr>
           <a:xfrm>
-            <a:off x="987552" y="2542032"/>
-            <a:ext cx="237744" cy="237744"/>
+            <a:off x="1110447" y="2655783"/>
+            <a:ext cx="266273" cy="266273"/>
           </a:xfrm>
           <a:prstGeom prst="rect">
             <a:avLst/>
@@ -6617,14 +6986,14 @@
       </p:pic>
       <p:sp>
         <p:nvSpPr>
-          <p:cNvPr id="8" name="TextBox 7"/>
+          <p:cNvPr id="9" name="TextBox 8"/>
           <p:cNvSpPr txBox="1"/>
           <p:nvPr/>
         </p:nvSpPr>
         <p:spPr>
           <a:xfrm>
-            <a:off x="1353312" y="2395728"/>
-            <a:ext cx="5029200" cy="530352"/>
+            <a:off x="1627632" y="2395728"/>
+            <a:ext cx="4206240" cy="786384"/>
           </a:xfrm>
           <a:prstGeom prst="rect">
             <a:avLst/>
@@ -6649,7 +7018,7 @@
               </a:spcAft>
             </a:pPr>
             <a:r>
-              <a:rPr sz="1200" b="0">
+              <a:rPr sz="1150" b="0">
                 <a:solidFill>
                   <a:srgbClr val="1A1A1A"/>
                 </a:solidFill>
@@ -6662,18 +7031,18 @@
       </p:sp>
       <p:sp>
         <p:nvSpPr>
-          <p:cNvPr id="9" name="Rounded Rectangle 8"/>
+          <p:cNvPr id="10" name="Rounded Rectangle 9"/>
           <p:cNvSpPr/>
           <p:nvPr/>
         </p:nvSpPr>
         <p:spPr>
           <a:xfrm>
-            <a:off x="841248" y="2999232"/>
-            <a:ext cx="5715000" cy="530352"/>
+            <a:off x="6254496" y="2395728"/>
+            <a:ext cx="5138928" cy="786384"/>
           </a:xfrm>
           <a:prstGeom prst="roundRect">
             <a:avLst>
-              <a:gd name="adj" fmla="val 6000"/>
+              <a:gd name="adj" fmla="val 7000"/>
             </a:avLst>
           </a:prstGeom>
           <a:solidFill>
@@ -6708,9 +7077,55 @@
           </a:p>
         </p:txBody>
       </p:sp>
+      <p:sp>
+        <p:nvSpPr>
+          <p:cNvPr id="11" name="Rounded Rectangle 10"/>
+          <p:cNvSpPr/>
+          <p:nvPr/>
+        </p:nvSpPr>
+        <p:spPr>
+          <a:xfrm>
+            <a:off x="6400800" y="2532888"/>
+            <a:ext cx="512064" cy="512064"/>
+          </a:xfrm>
+          <a:prstGeom prst="roundRect">
+            <a:avLst>
+              <a:gd name="adj" fmla="val 26000"/>
+            </a:avLst>
+          </a:prstGeom>
+          <a:solidFill>
+            <a:srgbClr val="EE0000"/>
+          </a:solidFill>
+          <a:ln>
+            <a:noFill/>
+          </a:ln>
+          <a:effectLst/>
+        </p:spPr>
+        <p:style>
+          <a:lnRef idx="1">
+            <a:schemeClr val="accent1"/>
+          </a:lnRef>
+          <a:fillRef idx="3">
+            <a:schemeClr val="accent1"/>
+          </a:fillRef>
+          <a:effectRef idx="2">
+            <a:schemeClr val="accent1"/>
+          </a:effectRef>
+          <a:fontRef idx="minor">
+            <a:schemeClr val="lt1"/>
+          </a:fontRef>
+        </p:style>
+        <p:txBody>
+          <a:bodyPr rtlCol="0" anchor="ctr"/>
+          <a:lstStyle/>
+          <a:p>
+            <a:pPr algn="ctr"/>
+          </a:p>
+        </p:txBody>
+      </p:sp>
       <p:pic>
         <p:nvPicPr>
-          <p:cNvPr id="10" name="Picture 9" descr="check_steel.png"/>
+          <p:cNvPr id="12" name="Picture 11" descr="check_white.png"/>
           <p:cNvPicPr>
             <a:picLocks noChangeAspect="1"/>
           </p:cNvPicPr>
@@ -6724,8 +7139,8 @@
         </p:blipFill>
         <p:spPr>
           <a:xfrm>
-            <a:off x="987552" y="3145536"/>
-            <a:ext cx="237744" cy="237744"/>
+            <a:off x="6523695" y="2655783"/>
+            <a:ext cx="266273" cy="266273"/>
           </a:xfrm>
           <a:prstGeom prst="rect">
             <a:avLst/>
@@ -6734,14 +7149,14 @@
       </p:pic>
       <p:sp>
         <p:nvSpPr>
-          <p:cNvPr id="11" name="TextBox 10"/>
+          <p:cNvPr id="13" name="TextBox 12"/>
           <p:cNvSpPr txBox="1"/>
           <p:nvPr/>
         </p:nvSpPr>
         <p:spPr>
           <a:xfrm>
-            <a:off x="1353312" y="2999232"/>
-            <a:ext cx="5029200" cy="530352"/>
+            <a:off x="7040880" y="2395728"/>
+            <a:ext cx="4206240" cy="786384"/>
           </a:xfrm>
           <a:prstGeom prst="rect">
             <a:avLst/>
@@ -6766,7 +7181,7 @@
               </a:spcAft>
             </a:pPr>
             <a:r>
-              <a:rPr sz="1200" b="0">
+              <a:rPr sz="1150" b="0">
                 <a:solidFill>
                   <a:srgbClr val="1A1A1A"/>
                 </a:solidFill>
@@ -6779,18 +7194,18 @@
       </p:sp>
       <p:sp>
         <p:nvSpPr>
-          <p:cNvPr id="12" name="Rounded Rectangle 11"/>
+          <p:cNvPr id="14" name="Rounded Rectangle 13"/>
           <p:cNvSpPr/>
           <p:nvPr/>
         </p:nvSpPr>
         <p:spPr>
           <a:xfrm>
-            <a:off x="841248" y="3602736"/>
-            <a:ext cx="5715000" cy="530352"/>
+            <a:off x="841248" y="3328416"/>
+            <a:ext cx="5138928" cy="786384"/>
           </a:xfrm>
           <a:prstGeom prst="roundRect">
             <a:avLst>
-              <a:gd name="adj" fmla="val 6000"/>
+              <a:gd name="adj" fmla="val 7000"/>
             </a:avLst>
           </a:prstGeom>
           <a:solidFill>
@@ -6825,9 +7240,55 @@
           </a:p>
         </p:txBody>
       </p:sp>
+      <p:sp>
+        <p:nvSpPr>
+          <p:cNvPr id="15" name="Rounded Rectangle 14"/>
+          <p:cNvSpPr/>
+          <p:nvPr/>
+        </p:nvSpPr>
+        <p:spPr>
+          <a:xfrm>
+            <a:off x="987552" y="3465576"/>
+            <a:ext cx="512064" cy="512064"/>
+          </a:xfrm>
+          <a:prstGeom prst="roundRect">
+            <a:avLst>
+              <a:gd name="adj" fmla="val 26000"/>
+            </a:avLst>
+          </a:prstGeom>
+          <a:solidFill>
+            <a:srgbClr val="EE0000"/>
+          </a:solidFill>
+          <a:ln>
+            <a:noFill/>
+          </a:ln>
+          <a:effectLst/>
+        </p:spPr>
+        <p:style>
+          <a:lnRef idx="1">
+            <a:schemeClr val="accent1"/>
+          </a:lnRef>
+          <a:fillRef idx="3">
+            <a:schemeClr val="accent1"/>
+          </a:fillRef>
+          <a:effectRef idx="2">
+            <a:schemeClr val="accent1"/>
+          </a:effectRef>
+          <a:fontRef idx="minor">
+            <a:schemeClr val="lt1"/>
+          </a:fontRef>
+        </p:style>
+        <p:txBody>
+          <a:bodyPr rtlCol="0" anchor="ctr"/>
+          <a:lstStyle/>
+          <a:p>
+            <a:pPr algn="ctr"/>
+          </a:p>
+        </p:txBody>
+      </p:sp>
       <p:pic>
         <p:nvPicPr>
-          <p:cNvPr id="13" name="Picture 12" descr="check_steel.png"/>
+          <p:cNvPr id="16" name="Picture 15" descr="check_white.png"/>
           <p:cNvPicPr>
             <a:picLocks noChangeAspect="1"/>
           </p:cNvPicPr>
@@ -6841,8 +7302,8 @@
         </p:blipFill>
         <p:spPr>
           <a:xfrm>
-            <a:off x="987552" y="3749040"/>
-            <a:ext cx="237744" cy="237744"/>
+            <a:off x="1110447" y="3588471"/>
+            <a:ext cx="266273" cy="266273"/>
           </a:xfrm>
           <a:prstGeom prst="rect">
             <a:avLst/>
@@ -6851,14 +7312,14 @@
       </p:pic>
       <p:sp>
         <p:nvSpPr>
-          <p:cNvPr id="14" name="TextBox 13"/>
+          <p:cNvPr id="17" name="TextBox 16"/>
           <p:cNvSpPr txBox="1"/>
           <p:nvPr/>
         </p:nvSpPr>
         <p:spPr>
           <a:xfrm>
-            <a:off x="1353312" y="3602736"/>
-            <a:ext cx="5029200" cy="530352"/>
+            <a:off x="1627632" y="3328416"/>
+            <a:ext cx="4206240" cy="786384"/>
           </a:xfrm>
           <a:prstGeom prst="rect">
             <a:avLst/>
@@ -6883,7 +7344,7 @@
               </a:spcAft>
             </a:pPr>
             <a:r>
-              <a:rPr sz="1200" b="0">
+              <a:rPr sz="1150" b="0">
                 <a:solidFill>
                   <a:srgbClr val="1A1A1A"/>
                 </a:solidFill>
@@ -6896,18 +7357,18 @@
       </p:sp>
       <p:sp>
         <p:nvSpPr>
-          <p:cNvPr id="15" name="Rounded Rectangle 14"/>
+          <p:cNvPr id="18" name="Rounded Rectangle 17"/>
           <p:cNvSpPr/>
           <p:nvPr/>
         </p:nvSpPr>
         <p:spPr>
           <a:xfrm>
-            <a:off x="841248" y="4206240"/>
-            <a:ext cx="5715000" cy="530352"/>
+            <a:off x="6254496" y="3328416"/>
+            <a:ext cx="5138928" cy="786384"/>
           </a:xfrm>
           <a:prstGeom prst="roundRect">
             <a:avLst>
-              <a:gd name="adj" fmla="val 6000"/>
+              <a:gd name="adj" fmla="val 7000"/>
             </a:avLst>
           </a:prstGeom>
           <a:solidFill>
@@ -6942,9 +7403,55 @@
           </a:p>
         </p:txBody>
       </p:sp>
+      <p:sp>
+        <p:nvSpPr>
+          <p:cNvPr id="19" name="Rounded Rectangle 18"/>
+          <p:cNvSpPr/>
+          <p:nvPr/>
+        </p:nvSpPr>
+        <p:spPr>
+          <a:xfrm>
+            <a:off x="6400800" y="3465576"/>
+            <a:ext cx="512064" cy="512064"/>
+          </a:xfrm>
+          <a:prstGeom prst="roundRect">
+            <a:avLst>
+              <a:gd name="adj" fmla="val 26000"/>
+            </a:avLst>
+          </a:prstGeom>
+          <a:solidFill>
+            <a:srgbClr val="EE0000"/>
+          </a:solidFill>
+          <a:ln>
+            <a:noFill/>
+          </a:ln>
+          <a:effectLst/>
+        </p:spPr>
+        <p:style>
+          <a:lnRef idx="1">
+            <a:schemeClr val="accent1"/>
+          </a:lnRef>
+          <a:fillRef idx="3">
+            <a:schemeClr val="accent1"/>
+          </a:fillRef>
+          <a:effectRef idx="2">
+            <a:schemeClr val="accent1"/>
+          </a:effectRef>
+          <a:fontRef idx="minor">
+            <a:schemeClr val="lt1"/>
+          </a:fontRef>
+        </p:style>
+        <p:txBody>
+          <a:bodyPr rtlCol="0" anchor="ctr"/>
+          <a:lstStyle/>
+          <a:p>
+            <a:pPr algn="ctr"/>
+          </a:p>
+        </p:txBody>
+      </p:sp>
       <p:pic>
         <p:nvPicPr>
-          <p:cNvPr id="16" name="Picture 15" descr="check_steel.png"/>
+          <p:cNvPr id="20" name="Picture 19" descr="check_white.png"/>
           <p:cNvPicPr>
             <a:picLocks noChangeAspect="1"/>
           </p:cNvPicPr>
@@ -6958,8 +7465,8 @@
         </p:blipFill>
         <p:spPr>
           <a:xfrm>
-            <a:off x="987552" y="4352544"/>
-            <a:ext cx="237744" cy="237744"/>
+            <a:off x="6523695" y="3588471"/>
+            <a:ext cx="266273" cy="266273"/>
           </a:xfrm>
           <a:prstGeom prst="rect">
             <a:avLst/>
@@ -6968,14 +7475,14 @@
       </p:pic>
       <p:sp>
         <p:nvSpPr>
-          <p:cNvPr id="17" name="TextBox 16"/>
+          <p:cNvPr id="21" name="TextBox 20"/>
           <p:cNvSpPr txBox="1"/>
           <p:nvPr/>
         </p:nvSpPr>
         <p:spPr>
           <a:xfrm>
-            <a:off x="1353312" y="4206240"/>
-            <a:ext cx="5029200" cy="530352"/>
+            <a:off x="7040880" y="3328416"/>
+            <a:ext cx="4206240" cy="786384"/>
           </a:xfrm>
           <a:prstGeom prst="rect">
             <a:avLst/>
@@ -7000,7 +7507,7 @@
               </a:spcAft>
             </a:pPr>
             <a:r>
-              <a:rPr sz="1200" b="0">
+              <a:rPr sz="1150" b="0">
                 <a:solidFill>
                   <a:srgbClr val="1A1A1A"/>
                 </a:solidFill>
@@ -7013,18 +7520,18 @@
       </p:sp>
       <p:sp>
         <p:nvSpPr>
-          <p:cNvPr id="18" name="Rounded Rectangle 17"/>
+          <p:cNvPr id="22" name="Rounded Rectangle 21"/>
           <p:cNvSpPr/>
           <p:nvPr/>
         </p:nvSpPr>
         <p:spPr>
           <a:xfrm>
-            <a:off x="841248" y="4809744"/>
-            <a:ext cx="5715000" cy="530352"/>
+            <a:off x="841248" y="4261104"/>
+            <a:ext cx="5138928" cy="786384"/>
           </a:xfrm>
           <a:prstGeom prst="roundRect">
             <a:avLst>
-              <a:gd name="adj" fmla="val 6000"/>
+              <a:gd name="adj" fmla="val 7000"/>
             </a:avLst>
           </a:prstGeom>
           <a:solidFill>
@@ -7059,9 +7566,55 @@
           </a:p>
         </p:txBody>
       </p:sp>
+      <p:sp>
+        <p:nvSpPr>
+          <p:cNvPr id="23" name="Rounded Rectangle 22"/>
+          <p:cNvSpPr/>
+          <p:nvPr/>
+        </p:nvSpPr>
+        <p:spPr>
+          <a:xfrm>
+            <a:off x="987552" y="4398264"/>
+            <a:ext cx="512064" cy="512064"/>
+          </a:xfrm>
+          <a:prstGeom prst="roundRect">
+            <a:avLst>
+              <a:gd name="adj" fmla="val 26000"/>
+            </a:avLst>
+          </a:prstGeom>
+          <a:solidFill>
+            <a:srgbClr val="EE0000"/>
+          </a:solidFill>
+          <a:ln>
+            <a:noFill/>
+          </a:ln>
+          <a:effectLst/>
+        </p:spPr>
+        <p:style>
+          <a:lnRef idx="1">
+            <a:schemeClr val="accent1"/>
+          </a:lnRef>
+          <a:fillRef idx="3">
+            <a:schemeClr val="accent1"/>
+          </a:fillRef>
+          <a:effectRef idx="2">
+            <a:schemeClr val="accent1"/>
+          </a:effectRef>
+          <a:fontRef idx="minor">
+            <a:schemeClr val="lt1"/>
+          </a:fontRef>
+        </p:style>
+        <p:txBody>
+          <a:bodyPr rtlCol="0" anchor="ctr"/>
+          <a:lstStyle/>
+          <a:p>
+            <a:pPr algn="ctr"/>
+          </a:p>
+        </p:txBody>
+      </p:sp>
       <p:pic>
         <p:nvPicPr>
-          <p:cNvPr id="19" name="Picture 18" descr="check_steel.png"/>
+          <p:cNvPr id="24" name="Picture 23" descr="check_white.png"/>
           <p:cNvPicPr>
             <a:picLocks noChangeAspect="1"/>
           </p:cNvPicPr>
@@ -7075,8 +7628,8 @@
         </p:blipFill>
         <p:spPr>
           <a:xfrm>
-            <a:off x="987552" y="4956048"/>
-            <a:ext cx="237744" cy="237744"/>
+            <a:off x="1110447" y="4521159"/>
+            <a:ext cx="266273" cy="266273"/>
           </a:xfrm>
           <a:prstGeom prst="rect">
             <a:avLst/>
@@ -7085,14 +7638,14 @@
       </p:pic>
       <p:sp>
         <p:nvSpPr>
-          <p:cNvPr id="20" name="TextBox 19"/>
+          <p:cNvPr id="25" name="TextBox 24"/>
           <p:cNvSpPr txBox="1"/>
           <p:nvPr/>
         </p:nvSpPr>
         <p:spPr>
           <a:xfrm>
-            <a:off x="1353312" y="4809744"/>
-            <a:ext cx="5029200" cy="530352"/>
+            <a:off x="1627632" y="4261104"/>
+            <a:ext cx="4206240" cy="786384"/>
           </a:xfrm>
           <a:prstGeom prst="rect">
             <a:avLst/>
@@ -7117,221 +7670,13 @@
               </a:spcAft>
             </a:pPr>
             <a:r>
-              <a:rPr sz="1200" b="0">
+              <a:rPr sz="1150" b="0">
                 <a:solidFill>
                   <a:srgbClr val="1A1A1A"/>
                 </a:solidFill>
                 <a:latin typeface="Red Hat Text"/>
               </a:rPr>
               <a:t>Real vaults come later (External Secrets)</a:t>
-            </a:r>
-          </a:p>
-        </p:txBody>
-      </p:sp>
-      <p:sp>
-        <p:nvSpPr>
-          <p:cNvPr id="21" name="Rounded Rectangle 20"/>
-          <p:cNvSpPr/>
-          <p:nvPr/>
-        </p:nvSpPr>
-        <p:spPr>
-          <a:xfrm>
-            <a:off x="6812280" y="2395728"/>
-            <a:ext cx="4538167" cy="2944368"/>
-          </a:xfrm>
-          <a:prstGeom prst="roundRect">
-            <a:avLst>
-              <a:gd name="adj" fmla="val 4000"/>
-            </a:avLst>
-          </a:prstGeom>
-          <a:solidFill>
-            <a:srgbClr val="FFFFFF"/>
-          </a:solidFill>
-          <a:ln w="15240">
-            <a:solidFill>
-              <a:srgbClr val="DDE1E6"/>
-            </a:solidFill>
-          </a:ln>
-          <a:effectLst/>
-        </p:spPr>
-        <p:style>
-          <a:lnRef idx="1">
-            <a:schemeClr val="accent1"/>
-          </a:lnRef>
-          <a:fillRef idx="3">
-            <a:schemeClr val="accent1"/>
-          </a:fillRef>
-          <a:effectRef idx="2">
-            <a:schemeClr val="accent1"/>
-          </a:effectRef>
-          <a:fontRef idx="minor">
-            <a:schemeClr val="lt1"/>
-          </a:fontRef>
-        </p:style>
-        <p:txBody>
-          <a:bodyPr rtlCol="0" anchor="ctr"/>
-          <a:lstStyle/>
-          <a:p>
-            <a:pPr algn="ctr"/>
-          </a:p>
-        </p:txBody>
-      </p:sp>
-      <p:sp>
-        <p:nvSpPr>
-          <p:cNvPr id="22" name="Rounded Rectangle 21"/>
-          <p:cNvSpPr/>
-          <p:nvPr/>
-        </p:nvSpPr>
-        <p:spPr>
-          <a:xfrm>
-            <a:off x="7013448" y="2596896"/>
-            <a:ext cx="1298448" cy="310896"/>
-          </a:xfrm>
-          <a:prstGeom prst="roundRect">
-            <a:avLst>
-              <a:gd name="adj" fmla="val 50000"/>
-            </a:avLst>
-          </a:prstGeom>
-          <a:solidFill>
-            <a:srgbClr val="FCECEC"/>
-          </a:solidFill>
-          <a:ln>
-            <a:noFill/>
-          </a:ln>
-          <a:effectLst/>
-        </p:spPr>
-        <p:style>
-          <a:lnRef idx="1">
-            <a:schemeClr val="accent1"/>
-          </a:lnRef>
-          <a:fillRef idx="3">
-            <a:schemeClr val="accent1"/>
-          </a:fillRef>
-          <a:effectRef idx="2">
-            <a:schemeClr val="accent1"/>
-          </a:effectRef>
-          <a:fontRef idx="minor">
-            <a:schemeClr val="lt1"/>
-          </a:fontRef>
-        </p:style>
-        <p:txBody>
-          <a:bodyPr rtlCol="0" anchor="ctr"/>
-          <a:lstStyle/>
-          <a:p>
-            <a:pPr algn="ctr"/>
-          </a:p>
-        </p:txBody>
-      </p:sp>
-      <p:sp>
-        <p:nvSpPr>
-          <p:cNvPr id="23" name="TextBox 22"/>
-          <p:cNvSpPr txBox="1"/>
-          <p:nvPr/>
-        </p:nvSpPr>
-        <p:spPr>
-          <a:xfrm>
-            <a:off x="7013448" y="2596896"/>
-            <a:ext cx="1298448" cy="310896"/>
-          </a:xfrm>
-          <a:prstGeom prst="rect">
-            <a:avLst/>
-          </a:prstGeom>
-          <a:noFill/>
-        </p:spPr>
-        <p:txBody>
-          <a:bodyPr wrap="none" anchor="ctr" lIns="0" rIns="0" tIns="0" bIns="0">
-            <a:spAutoFit/>
-          </a:bodyPr>
-          <a:lstStyle/>
-          <a:p>
-            <a:pPr algn="ctr">
-              <a:lnSpc>
-                <a:spcPct val="106000"/>
-              </a:lnSpc>
-              <a:spcBef>
-                <a:spcPts val="0"/>
-              </a:spcBef>
-              <a:spcAft>
-                <a:spcPts val="0"/>
-              </a:spcAft>
-            </a:pPr>
-            <a:r>
-              <a:rPr sz="850" b="1">
-                <a:solidFill>
-                  <a:srgbClr val="B80000"/>
-                </a:solidFill>
-                <a:latin typeface="Red Hat Display"/>
-              </a:rPr>
-              <a:t>MEDIA PASS</a:t>
-            </a:r>
-          </a:p>
-        </p:txBody>
-      </p:sp>
-      <p:pic>
-        <p:nvPicPr>
-          <p:cNvPr id="24" name="Picture 23" descr="eye_slate.png"/>
-          <p:cNvPicPr>
-            <a:picLocks noChangeAspect="1"/>
-          </p:cNvPicPr>
-          <p:nvPr/>
-        </p:nvPicPr>
-        <p:blipFill>
-          <a:blip r:embed="rId4"/>
-          <a:stretch>
-            <a:fillRect/>
-          </a:stretch>
-        </p:blipFill>
-        <p:spPr>
-          <a:xfrm>
-            <a:off x="8843619" y="3108960"/>
-            <a:ext cx="475488" cy="475488"/>
-          </a:xfrm>
-          <a:prstGeom prst="rect">
-            <a:avLst/>
-          </a:prstGeom>
-        </p:spPr>
-      </p:pic>
-      <p:sp>
-        <p:nvSpPr>
-          <p:cNvPr id="25" name="TextBox 24"/>
-          <p:cNvSpPr txBox="1"/>
-          <p:nvPr/>
-        </p:nvSpPr>
-        <p:spPr>
-          <a:xfrm>
-            <a:off x="7050024" y="3721608"/>
-            <a:ext cx="4062679" cy="1481328"/>
-          </a:xfrm>
-          <a:prstGeom prst="rect">
-            <a:avLst/>
-          </a:prstGeom>
-          <a:noFill/>
-        </p:spPr>
-        <p:txBody>
-          <a:bodyPr wrap="square" anchor="t" lIns="0" rIns="0" tIns="0" bIns="0">
-            <a:spAutoFit/>
-          </a:bodyPr>
-          <a:lstStyle/>
-          <a:p>
-            <a:pPr algn="l">
-              <a:lnSpc>
-                <a:spcPct val="120000"/>
-              </a:lnSpc>
-              <a:spcBef>
-                <a:spcPts val="0"/>
-              </a:spcBef>
-              <a:spcAft>
-                <a:spcPts val="0"/>
-              </a:spcAft>
-            </a:pPr>
-            <a:r>
-              <a:rPr sz="950" b="0">
-                <a:solidFill>
-                  <a:srgbClr val="8A9099"/>
-                </a:solidFill>
-                <a:latin typeface="Red Hat Text"/>
-              </a:rPr>
-              <a:t>Two cards side by side — ConfigMap (host, port, log level) and Secret (base64 blob with a "decodes in one command" callout).</a:t>
             </a:r>
           </a:p>
         </p:txBody>
@@ -7684,7 +8029,7 @@
         <p:spPr>
           <a:xfrm>
             <a:off x="841248" y="2670048"/>
-            <a:ext cx="5715000" cy="530352"/>
+            <a:ext cx="4160520" cy="475488"/>
           </a:xfrm>
           <a:prstGeom prst="roundRect">
             <a:avLst>
@@ -7739,8 +8084,8 @@
         </p:blipFill>
         <p:spPr>
           <a:xfrm>
-            <a:off x="987552" y="2816352"/>
-            <a:ext cx="237744" cy="237744"/>
+            <a:off x="969264" y="2807208"/>
+            <a:ext cx="201168" cy="201168"/>
           </a:xfrm>
           <a:prstGeom prst="rect">
             <a:avLst/>
@@ -7755,8 +8100,8 @@
         </p:nvSpPr>
         <p:spPr>
           <a:xfrm>
-            <a:off x="1353312" y="2670048"/>
-            <a:ext cx="5029200" cy="530352"/>
+            <a:off x="1280160" y="2670048"/>
+            <a:ext cx="3593591" cy="475488"/>
           </a:xfrm>
           <a:prstGeom prst="rect">
             <a:avLst/>
@@ -7781,7 +8126,7 @@
               </a:spcAft>
             </a:pPr>
             <a:r>
-              <a:rPr sz="1200" b="0">
+              <a:rPr sz="1050" b="0">
                 <a:solidFill>
                   <a:srgbClr val="1A1A1A"/>
                 </a:solidFill>
@@ -7800,8 +8145,8 @@
         </p:nvSpPr>
         <p:spPr>
           <a:xfrm>
-            <a:off x="841248" y="3273552"/>
-            <a:ext cx="5715000" cy="530352"/>
+            <a:off x="841248" y="3218688"/>
+            <a:ext cx="4160520" cy="475488"/>
           </a:xfrm>
           <a:prstGeom prst="roundRect">
             <a:avLst>
@@ -7856,8 +8201,8 @@
         </p:blipFill>
         <p:spPr>
           <a:xfrm>
-            <a:off x="987552" y="3419856"/>
-            <a:ext cx="237744" cy="237744"/>
+            <a:off x="969264" y="3355848"/>
+            <a:ext cx="201168" cy="201168"/>
           </a:xfrm>
           <a:prstGeom prst="rect">
             <a:avLst/>
@@ -7872,8 +8217,8 @@
         </p:nvSpPr>
         <p:spPr>
           <a:xfrm>
-            <a:off x="1353312" y="3273552"/>
-            <a:ext cx="5029200" cy="530352"/>
+            <a:off x="1280160" y="3218688"/>
+            <a:ext cx="3593591" cy="475488"/>
           </a:xfrm>
           <a:prstGeom prst="rect">
             <a:avLst/>
@@ -7898,7 +8243,7 @@
               </a:spcAft>
             </a:pPr>
             <a:r>
-              <a:rPr sz="1200" b="0">
+              <a:rPr sz="1050" b="0">
                 <a:solidFill>
                   <a:srgbClr val="1A1A1A"/>
                 </a:solidFill>
@@ -7917,8 +8262,8 @@
         </p:nvSpPr>
         <p:spPr>
           <a:xfrm>
-            <a:off x="841248" y="3877056"/>
-            <a:ext cx="5715000" cy="530352"/>
+            <a:off x="841248" y="3767328"/>
+            <a:ext cx="4160520" cy="475488"/>
           </a:xfrm>
           <a:prstGeom prst="roundRect">
             <a:avLst>
@@ -7973,8 +8318,8 @@
         </p:blipFill>
         <p:spPr>
           <a:xfrm>
-            <a:off x="987552" y="4023360"/>
-            <a:ext cx="237744" cy="237744"/>
+            <a:off x="969264" y="3904487"/>
+            <a:ext cx="201168" cy="201168"/>
           </a:xfrm>
           <a:prstGeom prst="rect">
             <a:avLst/>
@@ -7989,8 +8334,8 @@
         </p:nvSpPr>
         <p:spPr>
           <a:xfrm>
-            <a:off x="1353312" y="3877056"/>
-            <a:ext cx="5029200" cy="530352"/>
+            <a:off x="1280160" y="3767328"/>
+            <a:ext cx="3593591" cy="475488"/>
           </a:xfrm>
           <a:prstGeom prst="rect">
             <a:avLst/>
@@ -8015,7 +8360,7 @@
               </a:spcAft>
             </a:pPr>
             <a:r>
-              <a:rPr sz="1200" b="0">
+              <a:rPr sz="1050" b="0">
                 <a:solidFill>
                   <a:srgbClr val="1A1A1A"/>
                 </a:solidFill>
@@ -8034,8 +8379,8 @@
         </p:nvSpPr>
         <p:spPr>
           <a:xfrm>
-            <a:off x="841248" y="4480560"/>
-            <a:ext cx="5715000" cy="530352"/>
+            <a:off x="841248" y="4315968"/>
+            <a:ext cx="4160520" cy="475488"/>
           </a:xfrm>
           <a:prstGeom prst="roundRect">
             <a:avLst>
@@ -8090,8 +8435,8 @@
         </p:blipFill>
         <p:spPr>
           <a:xfrm>
-            <a:off x="987552" y="4626864"/>
-            <a:ext cx="237744" cy="237744"/>
+            <a:off x="969264" y="4453127"/>
+            <a:ext cx="201168" cy="201168"/>
           </a:xfrm>
           <a:prstGeom prst="rect">
             <a:avLst/>
@@ -8106,8 +8451,8 @@
         </p:nvSpPr>
         <p:spPr>
           <a:xfrm>
-            <a:off x="1353312" y="4480560"/>
-            <a:ext cx="5029200" cy="530352"/>
+            <a:off x="1280160" y="4315968"/>
+            <a:ext cx="3593591" cy="475488"/>
           </a:xfrm>
           <a:prstGeom prst="rect">
             <a:avLst/>
@@ -8132,7 +8477,7 @@
               </a:spcAft>
             </a:pPr>
             <a:r>
-              <a:rPr sz="1200" b="0">
+              <a:rPr sz="1050" b="0">
                 <a:solidFill>
                   <a:srgbClr val="1A1A1A"/>
                 </a:solidFill>
@@ -8151,8 +8496,8 @@
         </p:nvSpPr>
         <p:spPr>
           <a:xfrm>
-            <a:off x="841248" y="5084064"/>
-            <a:ext cx="5715000" cy="530352"/>
+            <a:off x="841248" y="4864607"/>
+            <a:ext cx="4160520" cy="475488"/>
           </a:xfrm>
           <a:prstGeom prst="roundRect">
             <a:avLst>
@@ -8207,8 +8552,8 @@
         </p:blipFill>
         <p:spPr>
           <a:xfrm>
-            <a:off x="987552" y="5230368"/>
-            <a:ext cx="237744" cy="237744"/>
+            <a:off x="969264" y="5001767"/>
+            <a:ext cx="201168" cy="201168"/>
           </a:xfrm>
           <a:prstGeom prst="rect">
             <a:avLst/>
@@ -8223,8 +8568,8 @@
         </p:nvSpPr>
         <p:spPr>
           <a:xfrm>
-            <a:off x="1353312" y="5084064"/>
-            <a:ext cx="5029200" cy="530352"/>
+            <a:off x="1280160" y="4864607"/>
+            <a:ext cx="3593591" cy="475488"/>
           </a:xfrm>
           <a:prstGeom prst="rect">
             <a:avLst/>
@@ -8249,7 +8594,7 @@
               </a:spcAft>
             </a:pPr>
             <a:r>
-              <a:rPr sz="1200" b="0">
+              <a:rPr sz="1050" b="0">
                 <a:solidFill>
                   <a:srgbClr val="1A1A1A"/>
                 </a:solidFill>
@@ -8268,8 +8613,8 @@
         </p:nvSpPr>
         <p:spPr>
           <a:xfrm>
-            <a:off x="6812280" y="2670048"/>
-            <a:ext cx="4538167" cy="2944368"/>
+            <a:off x="5385816" y="2762711"/>
+            <a:ext cx="5964631" cy="2557872"/>
           </a:xfrm>
           <a:prstGeom prst="roundRect">
             <a:avLst>
@@ -8308,100 +8653,9 @@
           </a:p>
         </p:txBody>
       </p:sp>
-      <p:sp>
-        <p:nvSpPr>
-          <p:cNvPr id="23" name="Rounded Rectangle 22"/>
-          <p:cNvSpPr/>
-          <p:nvPr/>
-        </p:nvSpPr>
-        <p:spPr>
-          <a:xfrm>
-            <a:off x="7013448" y="2871216"/>
-            <a:ext cx="1298448" cy="310896"/>
-          </a:xfrm>
-          <a:prstGeom prst="roundRect">
-            <a:avLst>
-              <a:gd name="adj" fmla="val 50000"/>
-            </a:avLst>
-          </a:prstGeom>
-          <a:solidFill>
-            <a:srgbClr val="FCECEC"/>
-          </a:solidFill>
-          <a:ln>
-            <a:noFill/>
-          </a:ln>
-          <a:effectLst/>
-        </p:spPr>
-        <p:style>
-          <a:lnRef idx="1">
-            <a:schemeClr val="accent1"/>
-          </a:lnRef>
-          <a:fillRef idx="3">
-            <a:schemeClr val="accent1"/>
-          </a:fillRef>
-          <a:effectRef idx="2">
-            <a:schemeClr val="accent1"/>
-          </a:effectRef>
-          <a:fontRef idx="minor">
-            <a:schemeClr val="lt1"/>
-          </a:fontRef>
-        </p:style>
-        <p:txBody>
-          <a:bodyPr rtlCol="0" anchor="ctr"/>
-          <a:lstStyle/>
-          <a:p>
-            <a:pPr algn="ctr"/>
-          </a:p>
-        </p:txBody>
-      </p:sp>
-      <p:sp>
-        <p:nvSpPr>
-          <p:cNvPr id="24" name="TextBox 23"/>
-          <p:cNvSpPr txBox="1"/>
-          <p:nvPr/>
-        </p:nvSpPr>
-        <p:spPr>
-          <a:xfrm>
-            <a:off x="7013448" y="2871216"/>
-            <a:ext cx="1298448" cy="310896"/>
-          </a:xfrm>
-          <a:prstGeom prst="rect">
-            <a:avLst/>
-          </a:prstGeom>
-          <a:noFill/>
-        </p:spPr>
-        <p:txBody>
-          <a:bodyPr wrap="none" anchor="ctr" lIns="0" rIns="0" tIns="0" bIns="0">
-            <a:spAutoFit/>
-          </a:bodyPr>
-          <a:lstStyle/>
-          <a:p>
-            <a:pPr algn="ctr">
-              <a:lnSpc>
-                <a:spcPct val="106000"/>
-              </a:lnSpc>
-              <a:spcBef>
-                <a:spcPts val="0"/>
-              </a:spcBef>
-              <a:spcAft>
-                <a:spcPts val="0"/>
-              </a:spcAft>
-            </a:pPr>
-            <a:r>
-              <a:rPr sz="850" b="1">
-                <a:solidFill>
-                  <a:srgbClr val="B80000"/>
-                </a:solidFill>
-                <a:latin typeface="Red Hat Display"/>
-              </a:rPr>
-              <a:t>MEDIA PASS</a:t>
-            </a:r>
-          </a:p>
-        </p:txBody>
-      </p:sp>
       <p:pic>
         <p:nvPicPr>
-          <p:cNvPr id="25" name="Picture 24" descr="eye_slate.png"/>
+          <p:cNvPr id="23" name="Picture 22" descr="02-readiness-gate.png"/>
           <p:cNvPicPr>
             <a:picLocks noChangeAspect="1"/>
           </p:cNvPicPr>
@@ -8415,62 +8669,17 @@
         </p:blipFill>
         <p:spPr>
           <a:xfrm>
-            <a:off x="8843619" y="3383280"/>
-            <a:ext cx="475488" cy="475488"/>
+            <a:off x="5532120" y="2909015"/>
+            <a:ext cx="5672023" cy="2265264"/>
           </a:xfrm>
           <a:prstGeom prst="rect">
             <a:avLst/>
           </a:prstGeom>
         </p:spPr>
       </p:pic>
-      <p:sp>
-        <p:nvSpPr>
-          <p:cNvPr id="26" name="TextBox 25"/>
-          <p:cNvSpPr txBox="1"/>
-          <p:nvPr/>
-        </p:nvSpPr>
-        <p:spPr>
-          <a:xfrm>
-            <a:off x="7050024" y="3995928"/>
-            <a:ext cx="4062679" cy="1481328"/>
-          </a:xfrm>
-          <a:prstGeom prst="rect">
-            <a:avLst/>
-          </a:prstGeom>
-          <a:noFill/>
-        </p:spPr>
-        <p:txBody>
-          <a:bodyPr wrap="square" anchor="t" lIns="0" rIns="0" tIns="0" bIns="0">
-            <a:spAutoFit/>
-          </a:bodyPr>
-          <a:lstStyle/>
-          <a:p>
-            <a:pPr algn="l">
-              <a:lnSpc>
-                <a:spcPct val="120000"/>
-              </a:lnSpc>
-              <a:spcBef>
-                <a:spcPts val="0"/>
-              </a:spcBef>
-              <a:spcAft>
-                <a:spcPts val="0"/>
-              </a:spcAft>
-            </a:pPr>
-            <a:r>
-              <a:rPr sz="950" b="0">
-                <a:solidFill>
-                  <a:srgbClr val="8A9099"/>
-                </a:solidFill>
-                <a:latin typeface="Red Hat Text"/>
-              </a:rPr>
-              <a:t>Reuse concept diagram config-multienv-...-02-readiness-gate.svg — a Route routing to a passing pod and NOT to a failing one (503).</a:t>
-            </a:r>
-          </a:p>
-        </p:txBody>
-      </p:sp>
       <p:cxnSp>
         <p:nvCxnSpPr>
-          <p:cNvPr id="27" name="Connector 26"/>
+          <p:cNvPr id="24" name="Connector 23"/>
           <p:cNvCxnSpPr/>
           <p:nvPr/>
         </p:nvCxnSpPr>
@@ -8506,7 +8715,7 @@
       </p:cxnSp>
       <p:sp>
         <p:nvSpPr>
-          <p:cNvPr id="28" name="TextBox 27"/>
+          <p:cNvPr id="25" name="TextBox 24"/>
           <p:cNvSpPr txBox="1"/>
           <p:nvPr/>
         </p:nvSpPr>
@@ -8551,7 +8760,7 @@
       </p:sp>
       <p:sp>
         <p:nvSpPr>
-          <p:cNvPr id="29" name="TextBox 28"/>
+          <p:cNvPr id="26" name="TextBox 25"/>
           <p:cNvSpPr txBox="1"/>
           <p:nvPr/>
         </p:nvSpPr>
@@ -8771,11 +8980,11 @@
         <p:spPr>
           <a:xfrm>
             <a:off x="841248" y="2395728"/>
-            <a:ext cx="5715000" cy="530352"/>
+            <a:ext cx="5138928" cy="786384"/>
           </a:xfrm>
           <a:prstGeom prst="roundRect">
             <a:avLst>
-              <a:gd name="adj" fmla="val 6000"/>
+              <a:gd name="adj" fmla="val 7000"/>
             </a:avLst>
           </a:prstGeom>
           <a:solidFill>
@@ -8810,9 +9019,55 @@
           </a:p>
         </p:txBody>
       </p:sp>
+      <p:sp>
+        <p:nvSpPr>
+          <p:cNvPr id="7" name="Rounded Rectangle 6"/>
+          <p:cNvSpPr/>
+          <p:nvPr/>
+        </p:nvSpPr>
+        <p:spPr>
+          <a:xfrm>
+            <a:off x="987552" y="2532888"/>
+            <a:ext cx="512064" cy="512064"/>
+          </a:xfrm>
+          <a:prstGeom prst="roundRect">
+            <a:avLst>
+              <a:gd name="adj" fmla="val 26000"/>
+            </a:avLst>
+          </a:prstGeom>
+          <a:solidFill>
+            <a:srgbClr val="EE0000"/>
+          </a:solidFill>
+          <a:ln>
+            <a:noFill/>
+          </a:ln>
+          <a:effectLst/>
+        </p:spPr>
+        <p:style>
+          <a:lnRef idx="1">
+            <a:schemeClr val="accent1"/>
+          </a:lnRef>
+          <a:fillRef idx="3">
+            <a:schemeClr val="accent1"/>
+          </a:fillRef>
+          <a:effectRef idx="2">
+            <a:schemeClr val="accent1"/>
+          </a:effectRef>
+          <a:fontRef idx="minor">
+            <a:schemeClr val="lt1"/>
+          </a:fontRef>
+        </p:style>
+        <p:txBody>
+          <a:bodyPr rtlCol="0" anchor="ctr"/>
+          <a:lstStyle/>
+          <a:p>
+            <a:pPr algn="ctr"/>
+          </a:p>
+        </p:txBody>
+      </p:sp>
       <p:pic>
         <p:nvPicPr>
-          <p:cNvPr id="7" name="Picture 6" descr="check_steel.png"/>
+          <p:cNvPr id="8" name="Picture 7" descr="check_white.png"/>
           <p:cNvPicPr>
             <a:picLocks noChangeAspect="1"/>
           </p:cNvPicPr>
@@ -8826,8 +9081,8 @@
         </p:blipFill>
         <p:spPr>
           <a:xfrm>
-            <a:off x="987552" y="2542032"/>
-            <a:ext cx="237744" cy="237744"/>
+            <a:off x="1110447" y="2655783"/>
+            <a:ext cx="266273" cy="266273"/>
           </a:xfrm>
           <a:prstGeom prst="rect">
             <a:avLst/>
@@ -8836,14 +9091,14 @@
       </p:pic>
       <p:sp>
         <p:nvSpPr>
-          <p:cNvPr id="8" name="TextBox 7"/>
+          <p:cNvPr id="9" name="TextBox 8"/>
           <p:cNvSpPr txBox="1"/>
           <p:nvPr/>
         </p:nvSpPr>
         <p:spPr>
           <a:xfrm>
-            <a:off x="1353312" y="2395728"/>
-            <a:ext cx="5029200" cy="530352"/>
+            <a:off x="1627632" y="2395728"/>
+            <a:ext cx="4206240" cy="786384"/>
           </a:xfrm>
           <a:prstGeom prst="rect">
             <a:avLst/>
@@ -8868,7 +9123,7 @@
               </a:spcAft>
             </a:pPr>
             <a:r>
-              <a:rPr sz="1200" b="0">
+              <a:rPr sz="1150" b="0">
                 <a:solidFill>
                   <a:srgbClr val="1A1A1A"/>
                 </a:solidFill>
@@ -8881,18 +9136,18 @@
       </p:sp>
       <p:sp>
         <p:nvSpPr>
-          <p:cNvPr id="9" name="Rounded Rectangle 8"/>
+          <p:cNvPr id="10" name="Rounded Rectangle 9"/>
           <p:cNvSpPr/>
           <p:nvPr/>
         </p:nvSpPr>
         <p:spPr>
           <a:xfrm>
-            <a:off x="841248" y="2999232"/>
-            <a:ext cx="5715000" cy="530352"/>
+            <a:off x="6254496" y="2395728"/>
+            <a:ext cx="5138928" cy="786384"/>
           </a:xfrm>
           <a:prstGeom prst="roundRect">
             <a:avLst>
-              <a:gd name="adj" fmla="val 6000"/>
+              <a:gd name="adj" fmla="val 7000"/>
             </a:avLst>
           </a:prstGeom>
           <a:solidFill>
@@ -8927,9 +9182,55 @@
           </a:p>
         </p:txBody>
       </p:sp>
+      <p:sp>
+        <p:nvSpPr>
+          <p:cNvPr id="11" name="Rounded Rectangle 10"/>
+          <p:cNvSpPr/>
+          <p:nvPr/>
+        </p:nvSpPr>
+        <p:spPr>
+          <a:xfrm>
+            <a:off x="6400800" y="2532888"/>
+            <a:ext cx="512064" cy="512064"/>
+          </a:xfrm>
+          <a:prstGeom prst="roundRect">
+            <a:avLst>
+              <a:gd name="adj" fmla="val 26000"/>
+            </a:avLst>
+          </a:prstGeom>
+          <a:solidFill>
+            <a:srgbClr val="EE0000"/>
+          </a:solidFill>
+          <a:ln>
+            <a:noFill/>
+          </a:ln>
+          <a:effectLst/>
+        </p:spPr>
+        <p:style>
+          <a:lnRef idx="1">
+            <a:schemeClr val="accent1"/>
+          </a:lnRef>
+          <a:fillRef idx="3">
+            <a:schemeClr val="accent1"/>
+          </a:fillRef>
+          <a:effectRef idx="2">
+            <a:schemeClr val="accent1"/>
+          </a:effectRef>
+          <a:fontRef idx="minor">
+            <a:schemeClr val="lt1"/>
+          </a:fontRef>
+        </p:style>
+        <p:txBody>
+          <a:bodyPr rtlCol="0" anchor="ctr"/>
+          <a:lstStyle/>
+          <a:p>
+            <a:pPr algn="ctr"/>
+          </a:p>
+        </p:txBody>
+      </p:sp>
       <p:pic>
         <p:nvPicPr>
-          <p:cNvPr id="10" name="Picture 9" descr="check_steel.png"/>
+          <p:cNvPr id="12" name="Picture 11" descr="check_white.png"/>
           <p:cNvPicPr>
             <a:picLocks noChangeAspect="1"/>
           </p:cNvPicPr>
@@ -8943,8 +9244,8 @@
         </p:blipFill>
         <p:spPr>
           <a:xfrm>
-            <a:off x="987552" y="3145536"/>
-            <a:ext cx="237744" cy="237744"/>
+            <a:off x="6523695" y="2655783"/>
+            <a:ext cx="266273" cy="266273"/>
           </a:xfrm>
           <a:prstGeom prst="rect">
             <a:avLst/>
@@ -8953,14 +9254,14 @@
       </p:pic>
       <p:sp>
         <p:nvSpPr>
-          <p:cNvPr id="11" name="TextBox 10"/>
+          <p:cNvPr id="13" name="TextBox 12"/>
           <p:cNvSpPr txBox="1"/>
           <p:nvPr/>
         </p:nvSpPr>
         <p:spPr>
           <a:xfrm>
-            <a:off x="1353312" y="2999232"/>
-            <a:ext cx="5029200" cy="530352"/>
+            <a:off x="7040880" y="2395728"/>
+            <a:ext cx="4206240" cy="786384"/>
           </a:xfrm>
           <a:prstGeom prst="rect">
             <a:avLst/>
@@ -8985,7 +9286,7 @@
               </a:spcAft>
             </a:pPr>
             <a:r>
-              <a:rPr sz="1200" b="0">
+              <a:rPr sz="1150" b="0">
                 <a:solidFill>
                   <a:srgbClr val="1A1A1A"/>
                 </a:solidFill>
@@ -8998,18 +9299,18 @@
       </p:sp>
       <p:sp>
         <p:nvSpPr>
-          <p:cNvPr id="12" name="Rounded Rectangle 11"/>
+          <p:cNvPr id="14" name="Rounded Rectangle 13"/>
           <p:cNvSpPr/>
           <p:nvPr/>
         </p:nvSpPr>
         <p:spPr>
           <a:xfrm>
-            <a:off x="841248" y="3602736"/>
-            <a:ext cx="5715000" cy="530352"/>
+            <a:off x="841248" y="3328416"/>
+            <a:ext cx="5138928" cy="786384"/>
           </a:xfrm>
           <a:prstGeom prst="roundRect">
             <a:avLst>
-              <a:gd name="adj" fmla="val 6000"/>
+              <a:gd name="adj" fmla="val 7000"/>
             </a:avLst>
           </a:prstGeom>
           <a:solidFill>
@@ -9044,9 +9345,55 @@
           </a:p>
         </p:txBody>
       </p:sp>
+      <p:sp>
+        <p:nvSpPr>
+          <p:cNvPr id="15" name="Rounded Rectangle 14"/>
+          <p:cNvSpPr/>
+          <p:nvPr/>
+        </p:nvSpPr>
+        <p:spPr>
+          <a:xfrm>
+            <a:off x="987552" y="3465576"/>
+            <a:ext cx="512064" cy="512064"/>
+          </a:xfrm>
+          <a:prstGeom prst="roundRect">
+            <a:avLst>
+              <a:gd name="adj" fmla="val 26000"/>
+            </a:avLst>
+          </a:prstGeom>
+          <a:solidFill>
+            <a:srgbClr val="EE0000"/>
+          </a:solidFill>
+          <a:ln>
+            <a:noFill/>
+          </a:ln>
+          <a:effectLst/>
+        </p:spPr>
+        <p:style>
+          <a:lnRef idx="1">
+            <a:schemeClr val="accent1"/>
+          </a:lnRef>
+          <a:fillRef idx="3">
+            <a:schemeClr val="accent1"/>
+          </a:fillRef>
+          <a:effectRef idx="2">
+            <a:schemeClr val="accent1"/>
+          </a:effectRef>
+          <a:fontRef idx="minor">
+            <a:schemeClr val="lt1"/>
+          </a:fontRef>
+        </p:style>
+        <p:txBody>
+          <a:bodyPr rtlCol="0" anchor="ctr"/>
+          <a:lstStyle/>
+          <a:p>
+            <a:pPr algn="ctr"/>
+          </a:p>
+        </p:txBody>
+      </p:sp>
       <p:pic>
         <p:nvPicPr>
-          <p:cNvPr id="13" name="Picture 12" descr="check_steel.png"/>
+          <p:cNvPr id="16" name="Picture 15" descr="check_white.png"/>
           <p:cNvPicPr>
             <a:picLocks noChangeAspect="1"/>
           </p:cNvPicPr>
@@ -9060,8 +9407,8 @@
         </p:blipFill>
         <p:spPr>
           <a:xfrm>
-            <a:off x="987552" y="3749040"/>
-            <a:ext cx="237744" cy="237744"/>
+            <a:off x="1110447" y="3588471"/>
+            <a:ext cx="266273" cy="266273"/>
           </a:xfrm>
           <a:prstGeom prst="rect">
             <a:avLst/>
@@ -9070,14 +9417,14 @@
       </p:pic>
       <p:sp>
         <p:nvSpPr>
-          <p:cNvPr id="14" name="TextBox 13"/>
+          <p:cNvPr id="17" name="TextBox 16"/>
           <p:cNvSpPr txBox="1"/>
           <p:nvPr/>
         </p:nvSpPr>
         <p:spPr>
           <a:xfrm>
-            <a:off x="1353312" y="3602736"/>
-            <a:ext cx="5029200" cy="530352"/>
+            <a:off x="1627632" y="3328416"/>
+            <a:ext cx="4206240" cy="786384"/>
           </a:xfrm>
           <a:prstGeom prst="rect">
             <a:avLst/>
@@ -9102,7 +9449,7 @@
               </a:spcAft>
             </a:pPr>
             <a:r>
-              <a:rPr sz="1200" b="0">
+              <a:rPr sz="1150" b="0">
                 <a:solidFill>
                   <a:srgbClr val="1A1A1A"/>
                 </a:solidFill>
@@ -9115,18 +9462,18 @@
       </p:sp>
       <p:sp>
         <p:nvSpPr>
-          <p:cNvPr id="15" name="Rounded Rectangle 14"/>
+          <p:cNvPr id="18" name="Rounded Rectangle 17"/>
           <p:cNvSpPr/>
           <p:nvPr/>
         </p:nvSpPr>
         <p:spPr>
           <a:xfrm>
-            <a:off x="841248" y="4206240"/>
-            <a:ext cx="5715000" cy="530352"/>
+            <a:off x="6254496" y="3328416"/>
+            <a:ext cx="5138928" cy="786384"/>
           </a:xfrm>
           <a:prstGeom prst="roundRect">
             <a:avLst>
-              <a:gd name="adj" fmla="val 6000"/>
+              <a:gd name="adj" fmla="val 7000"/>
             </a:avLst>
           </a:prstGeom>
           <a:solidFill>
@@ -9161,9 +9508,55 @@
           </a:p>
         </p:txBody>
       </p:sp>
+      <p:sp>
+        <p:nvSpPr>
+          <p:cNvPr id="19" name="Rounded Rectangle 18"/>
+          <p:cNvSpPr/>
+          <p:nvPr/>
+        </p:nvSpPr>
+        <p:spPr>
+          <a:xfrm>
+            <a:off x="6400800" y="3465576"/>
+            <a:ext cx="512064" cy="512064"/>
+          </a:xfrm>
+          <a:prstGeom prst="roundRect">
+            <a:avLst>
+              <a:gd name="adj" fmla="val 26000"/>
+            </a:avLst>
+          </a:prstGeom>
+          <a:solidFill>
+            <a:srgbClr val="EE0000"/>
+          </a:solidFill>
+          <a:ln>
+            <a:noFill/>
+          </a:ln>
+          <a:effectLst/>
+        </p:spPr>
+        <p:style>
+          <a:lnRef idx="1">
+            <a:schemeClr val="accent1"/>
+          </a:lnRef>
+          <a:fillRef idx="3">
+            <a:schemeClr val="accent1"/>
+          </a:fillRef>
+          <a:effectRef idx="2">
+            <a:schemeClr val="accent1"/>
+          </a:effectRef>
+          <a:fontRef idx="minor">
+            <a:schemeClr val="lt1"/>
+          </a:fontRef>
+        </p:style>
+        <p:txBody>
+          <a:bodyPr rtlCol="0" anchor="ctr"/>
+          <a:lstStyle/>
+          <a:p>
+            <a:pPr algn="ctr"/>
+          </a:p>
+        </p:txBody>
+      </p:sp>
       <p:pic>
         <p:nvPicPr>
-          <p:cNvPr id="16" name="Picture 15" descr="check_steel.png"/>
+          <p:cNvPr id="20" name="Picture 19" descr="check_white.png"/>
           <p:cNvPicPr>
             <a:picLocks noChangeAspect="1"/>
           </p:cNvPicPr>
@@ -9177,8 +9570,8 @@
         </p:blipFill>
         <p:spPr>
           <a:xfrm>
-            <a:off x="987552" y="4352544"/>
-            <a:ext cx="237744" cy="237744"/>
+            <a:off x="6523695" y="3588471"/>
+            <a:ext cx="266273" cy="266273"/>
           </a:xfrm>
           <a:prstGeom prst="rect">
             <a:avLst/>
@@ -9187,14 +9580,14 @@
       </p:pic>
       <p:sp>
         <p:nvSpPr>
-          <p:cNvPr id="17" name="TextBox 16"/>
+          <p:cNvPr id="21" name="TextBox 20"/>
           <p:cNvSpPr txBox="1"/>
           <p:nvPr/>
         </p:nvSpPr>
         <p:spPr>
           <a:xfrm>
-            <a:off x="1353312" y="4206240"/>
-            <a:ext cx="5029200" cy="530352"/>
+            <a:off x="7040880" y="3328416"/>
+            <a:ext cx="4206240" cy="786384"/>
           </a:xfrm>
           <a:prstGeom prst="rect">
             <a:avLst/>
@@ -9219,7 +9612,7 @@
               </a:spcAft>
             </a:pPr>
             <a:r>
-              <a:rPr sz="1200" b="0">
+              <a:rPr sz="1150" b="0">
                 <a:solidFill>
                   <a:srgbClr val="1A1A1A"/>
                 </a:solidFill>
@@ -9232,18 +9625,18 @@
       </p:sp>
       <p:sp>
         <p:nvSpPr>
-          <p:cNvPr id="18" name="Rounded Rectangle 17"/>
+          <p:cNvPr id="22" name="Rounded Rectangle 21"/>
           <p:cNvSpPr/>
           <p:nvPr/>
         </p:nvSpPr>
         <p:spPr>
           <a:xfrm>
-            <a:off x="841248" y="4809744"/>
-            <a:ext cx="5715000" cy="530352"/>
+            <a:off x="841248" y="4261104"/>
+            <a:ext cx="5138928" cy="786384"/>
           </a:xfrm>
           <a:prstGeom prst="roundRect">
             <a:avLst>
-              <a:gd name="adj" fmla="val 6000"/>
+              <a:gd name="adj" fmla="val 7000"/>
             </a:avLst>
           </a:prstGeom>
           <a:solidFill>
@@ -9278,9 +9671,55 @@
           </a:p>
         </p:txBody>
       </p:sp>
+      <p:sp>
+        <p:nvSpPr>
+          <p:cNvPr id="23" name="Rounded Rectangle 22"/>
+          <p:cNvSpPr/>
+          <p:nvPr/>
+        </p:nvSpPr>
+        <p:spPr>
+          <a:xfrm>
+            <a:off x="987552" y="4398264"/>
+            <a:ext cx="512064" cy="512064"/>
+          </a:xfrm>
+          <a:prstGeom prst="roundRect">
+            <a:avLst>
+              <a:gd name="adj" fmla="val 26000"/>
+            </a:avLst>
+          </a:prstGeom>
+          <a:solidFill>
+            <a:srgbClr val="EE0000"/>
+          </a:solidFill>
+          <a:ln>
+            <a:noFill/>
+          </a:ln>
+          <a:effectLst/>
+        </p:spPr>
+        <p:style>
+          <a:lnRef idx="1">
+            <a:schemeClr val="accent1"/>
+          </a:lnRef>
+          <a:fillRef idx="3">
+            <a:schemeClr val="accent1"/>
+          </a:fillRef>
+          <a:effectRef idx="2">
+            <a:schemeClr val="accent1"/>
+          </a:effectRef>
+          <a:fontRef idx="minor">
+            <a:schemeClr val="lt1"/>
+          </a:fontRef>
+        </p:style>
+        <p:txBody>
+          <a:bodyPr rtlCol="0" anchor="ctr"/>
+          <a:lstStyle/>
+          <a:p>
+            <a:pPr algn="ctr"/>
+          </a:p>
+        </p:txBody>
+      </p:sp>
       <p:pic>
         <p:nvPicPr>
-          <p:cNvPr id="19" name="Picture 18" descr="check_steel.png"/>
+          <p:cNvPr id="24" name="Picture 23" descr="check_white.png"/>
           <p:cNvPicPr>
             <a:picLocks noChangeAspect="1"/>
           </p:cNvPicPr>
@@ -9294,8 +9733,8 @@
         </p:blipFill>
         <p:spPr>
           <a:xfrm>
-            <a:off x="987552" y="4956048"/>
-            <a:ext cx="237744" cy="237744"/>
+            <a:off x="1110447" y="4521159"/>
+            <a:ext cx="266273" cy="266273"/>
           </a:xfrm>
           <a:prstGeom prst="rect">
             <a:avLst/>
@@ -9304,14 +9743,14 @@
       </p:pic>
       <p:sp>
         <p:nvSpPr>
-          <p:cNvPr id="20" name="TextBox 19"/>
+          <p:cNvPr id="25" name="TextBox 24"/>
           <p:cNvSpPr txBox="1"/>
           <p:nvPr/>
         </p:nvSpPr>
         <p:spPr>
           <a:xfrm>
-            <a:off x="1353312" y="4809744"/>
-            <a:ext cx="5029200" cy="530352"/>
+            <a:off x="1627632" y="4261104"/>
+            <a:ext cx="4206240" cy="786384"/>
           </a:xfrm>
           <a:prstGeom prst="rect">
             <a:avLst/>
@@ -9336,221 +9775,13 @@
               </a:spcAft>
             </a:pPr>
             <a:r>
-              <a:rPr sz="1200" b="0">
+              <a:rPr sz="1150" b="0">
                 <a:solidFill>
                   <a:srgbClr val="1A1A1A"/>
                 </a:solidFill>
                 <a:latin typeface="Red Hat Text"/>
               </a:rPr>
               <a:t>Right-size requests; don't fight the room</a:t>
-            </a:r>
-          </a:p>
-        </p:txBody>
-      </p:sp>
-      <p:sp>
-        <p:nvSpPr>
-          <p:cNvPr id="21" name="Rounded Rectangle 20"/>
-          <p:cNvSpPr/>
-          <p:nvPr/>
-        </p:nvSpPr>
-        <p:spPr>
-          <a:xfrm>
-            <a:off x="6812280" y="2395728"/>
-            <a:ext cx="4538167" cy="2944368"/>
-          </a:xfrm>
-          <a:prstGeom prst="roundRect">
-            <a:avLst>
-              <a:gd name="adj" fmla="val 4000"/>
-            </a:avLst>
-          </a:prstGeom>
-          <a:solidFill>
-            <a:srgbClr val="FFFFFF"/>
-          </a:solidFill>
-          <a:ln w="15240">
-            <a:solidFill>
-              <a:srgbClr val="DDE1E6"/>
-            </a:solidFill>
-          </a:ln>
-          <a:effectLst/>
-        </p:spPr>
-        <p:style>
-          <a:lnRef idx="1">
-            <a:schemeClr val="accent1"/>
-          </a:lnRef>
-          <a:fillRef idx="3">
-            <a:schemeClr val="accent1"/>
-          </a:fillRef>
-          <a:effectRef idx="2">
-            <a:schemeClr val="accent1"/>
-          </a:effectRef>
-          <a:fontRef idx="minor">
-            <a:schemeClr val="lt1"/>
-          </a:fontRef>
-        </p:style>
-        <p:txBody>
-          <a:bodyPr rtlCol="0" anchor="ctr"/>
-          <a:lstStyle/>
-          <a:p>
-            <a:pPr algn="ctr"/>
-          </a:p>
-        </p:txBody>
-      </p:sp>
-      <p:sp>
-        <p:nvSpPr>
-          <p:cNvPr id="22" name="Rounded Rectangle 21"/>
-          <p:cNvSpPr/>
-          <p:nvPr/>
-        </p:nvSpPr>
-        <p:spPr>
-          <a:xfrm>
-            <a:off x="7013448" y="2596896"/>
-            <a:ext cx="1298448" cy="310896"/>
-          </a:xfrm>
-          <a:prstGeom prst="roundRect">
-            <a:avLst>
-              <a:gd name="adj" fmla="val 50000"/>
-            </a:avLst>
-          </a:prstGeom>
-          <a:solidFill>
-            <a:srgbClr val="FCECEC"/>
-          </a:solidFill>
-          <a:ln>
-            <a:noFill/>
-          </a:ln>
-          <a:effectLst/>
-        </p:spPr>
-        <p:style>
-          <a:lnRef idx="1">
-            <a:schemeClr val="accent1"/>
-          </a:lnRef>
-          <a:fillRef idx="3">
-            <a:schemeClr val="accent1"/>
-          </a:fillRef>
-          <a:effectRef idx="2">
-            <a:schemeClr val="accent1"/>
-          </a:effectRef>
-          <a:fontRef idx="minor">
-            <a:schemeClr val="lt1"/>
-          </a:fontRef>
-        </p:style>
-        <p:txBody>
-          <a:bodyPr rtlCol="0" anchor="ctr"/>
-          <a:lstStyle/>
-          <a:p>
-            <a:pPr algn="ctr"/>
-          </a:p>
-        </p:txBody>
-      </p:sp>
-      <p:sp>
-        <p:nvSpPr>
-          <p:cNvPr id="23" name="TextBox 22"/>
-          <p:cNvSpPr txBox="1"/>
-          <p:nvPr/>
-        </p:nvSpPr>
-        <p:spPr>
-          <a:xfrm>
-            <a:off x="7013448" y="2596896"/>
-            <a:ext cx="1298448" cy="310896"/>
-          </a:xfrm>
-          <a:prstGeom prst="rect">
-            <a:avLst/>
-          </a:prstGeom>
-          <a:noFill/>
-        </p:spPr>
-        <p:txBody>
-          <a:bodyPr wrap="none" anchor="ctr" lIns="0" rIns="0" tIns="0" bIns="0">
-            <a:spAutoFit/>
-          </a:bodyPr>
-          <a:lstStyle/>
-          <a:p>
-            <a:pPr algn="ctr">
-              <a:lnSpc>
-                <a:spcPct val="106000"/>
-              </a:lnSpc>
-              <a:spcBef>
-                <a:spcPts val="0"/>
-              </a:spcBef>
-              <a:spcAft>
-                <a:spcPts val="0"/>
-              </a:spcAft>
-            </a:pPr>
-            <a:r>
-              <a:rPr sz="850" b="1">
-                <a:solidFill>
-                  <a:srgbClr val="B80000"/>
-                </a:solidFill>
-                <a:latin typeface="Red Hat Display"/>
-              </a:rPr>
-              <a:t>MEDIA PASS</a:t>
-            </a:r>
-          </a:p>
-        </p:txBody>
-      </p:sp>
-      <p:pic>
-        <p:nvPicPr>
-          <p:cNvPr id="24" name="Picture 23" descr="eye_slate.png"/>
-          <p:cNvPicPr>
-            <a:picLocks noChangeAspect="1"/>
-          </p:cNvPicPr>
-          <p:nvPr/>
-        </p:nvPicPr>
-        <p:blipFill>
-          <a:blip r:embed="rId4"/>
-          <a:stretch>
-            <a:fillRect/>
-          </a:stretch>
-        </p:blipFill>
-        <p:spPr>
-          <a:xfrm>
-            <a:off x="8843619" y="3108960"/>
-            <a:ext cx="475488" cy="475488"/>
-          </a:xfrm>
-          <a:prstGeom prst="rect">
-            <a:avLst/>
-          </a:prstGeom>
-        </p:spPr>
-      </p:pic>
-      <p:sp>
-        <p:nvSpPr>
-          <p:cNvPr id="25" name="TextBox 24"/>
-          <p:cNvSpPr txBox="1"/>
-          <p:nvPr/>
-        </p:nvSpPr>
-        <p:spPr>
-          <a:xfrm>
-            <a:off x="7050024" y="3721608"/>
-            <a:ext cx="4062679" cy="1481328"/>
-          </a:xfrm>
-          <a:prstGeom prst="rect">
-            <a:avLst/>
-          </a:prstGeom>
-          <a:noFill/>
-        </p:spPr>
-        <p:txBody>
-          <a:bodyPr wrap="square" anchor="t" lIns="0" rIns="0" tIns="0" bIns="0">
-            <a:spAutoFit/>
-          </a:bodyPr>
-          <a:lstStyle/>
-          <a:p>
-            <a:pPr algn="l">
-              <a:lnSpc>
-                <a:spcPct val="120000"/>
-              </a:lnSpc>
-              <a:spcBef>
-                <a:spcPts val="0"/>
-              </a:spcBef>
-              <a:spcAft>
-                <a:spcPts val="0"/>
-              </a:spcAft>
-            </a:pPr>
-            <a:r>
-              <a:rPr sz="950" b="0">
-                <a:solidFill>
-                  <a:srgbClr val="8A9099"/>
-                </a:solidFill>
-                <a:latin typeface="Red Hat Text"/>
-              </a:rPr>
-              <a:t>A namespace box with a quota meter (requests.cpu 3 cores), a normal pod fitting and an oversized pod bouncing off with an "exceeded quota" tag.</a:t>
             </a:r>
           </a:p>
         </p:txBody>
@@ -9858,7 +10089,7 @@
         <p:spPr>
           <a:xfrm>
             <a:off x="841248" y="2395728"/>
-            <a:ext cx="5715000" cy="530352"/>
+            <a:ext cx="4160520" cy="475488"/>
           </a:xfrm>
           <a:prstGeom prst="roundRect">
             <a:avLst>
@@ -9913,8 +10144,8 @@
         </p:blipFill>
         <p:spPr>
           <a:xfrm>
-            <a:off x="987552" y="2542032"/>
-            <a:ext cx="237744" cy="237744"/>
+            <a:off x="969264" y="2532888"/>
+            <a:ext cx="201168" cy="201168"/>
           </a:xfrm>
           <a:prstGeom prst="rect">
             <a:avLst/>
@@ -9929,8 +10160,8 @@
         </p:nvSpPr>
         <p:spPr>
           <a:xfrm>
-            <a:off x="1353312" y="2395728"/>
-            <a:ext cx="5029200" cy="530352"/>
+            <a:off x="1280160" y="2395728"/>
+            <a:ext cx="3593591" cy="475488"/>
           </a:xfrm>
           <a:prstGeom prst="rect">
             <a:avLst/>
@@ -9955,7 +10186,7 @@
               </a:spcAft>
             </a:pPr>
             <a:r>
-              <a:rPr sz="1200" b="0">
+              <a:rPr sz="1050" b="0">
                 <a:solidFill>
                   <a:srgbClr val="1A1A1A"/>
                 </a:solidFill>
@@ -9974,8 +10205,8 @@
         </p:nvSpPr>
         <p:spPr>
           <a:xfrm>
-            <a:off x="841248" y="2999232"/>
-            <a:ext cx="5715000" cy="530352"/>
+            <a:off x="841248" y="2944368"/>
+            <a:ext cx="4160520" cy="475488"/>
           </a:xfrm>
           <a:prstGeom prst="roundRect">
             <a:avLst>
@@ -10030,8 +10261,8 @@
         </p:blipFill>
         <p:spPr>
           <a:xfrm>
-            <a:off x="987552" y="3145536"/>
-            <a:ext cx="237744" cy="237744"/>
+            <a:off x="969264" y="3081528"/>
+            <a:ext cx="201168" cy="201168"/>
           </a:xfrm>
           <a:prstGeom prst="rect">
             <a:avLst/>
@@ -10046,8 +10277,8 @@
         </p:nvSpPr>
         <p:spPr>
           <a:xfrm>
-            <a:off x="1353312" y="2999232"/>
-            <a:ext cx="5029200" cy="530352"/>
+            <a:off x="1280160" y="2944368"/>
+            <a:ext cx="3593591" cy="475488"/>
           </a:xfrm>
           <a:prstGeom prst="rect">
             <a:avLst/>
@@ -10072,7 +10303,7 @@
               </a:spcAft>
             </a:pPr>
             <a:r>
-              <a:rPr sz="1200" b="0">
+              <a:rPr sz="1050" b="0">
                 <a:solidFill>
                   <a:srgbClr val="1A1A1A"/>
                 </a:solidFill>
@@ -10091,8 +10322,8 @@
         </p:nvSpPr>
         <p:spPr>
           <a:xfrm>
-            <a:off x="841248" y="3602736"/>
-            <a:ext cx="5715000" cy="530352"/>
+            <a:off x="841248" y="3493008"/>
+            <a:ext cx="4160520" cy="475488"/>
           </a:xfrm>
           <a:prstGeom prst="roundRect">
             <a:avLst>
@@ -10147,8 +10378,8 @@
         </p:blipFill>
         <p:spPr>
           <a:xfrm>
-            <a:off x="987552" y="3749040"/>
-            <a:ext cx="237744" cy="237744"/>
+            <a:off x="969264" y="3630168"/>
+            <a:ext cx="201168" cy="201168"/>
           </a:xfrm>
           <a:prstGeom prst="rect">
             <a:avLst/>
@@ -10163,8 +10394,8 @@
         </p:nvSpPr>
         <p:spPr>
           <a:xfrm>
-            <a:off x="1353312" y="3602736"/>
-            <a:ext cx="5029200" cy="530352"/>
+            <a:off x="1280160" y="3493008"/>
+            <a:ext cx="3593591" cy="475488"/>
           </a:xfrm>
           <a:prstGeom prst="rect">
             <a:avLst/>
@@ -10189,7 +10420,7 @@
               </a:spcAft>
             </a:pPr>
             <a:r>
-              <a:rPr sz="1200" b="0">
+              <a:rPr sz="1050" b="0">
                 <a:solidFill>
                   <a:srgbClr val="1A1A1A"/>
                 </a:solidFill>
@@ -10208,8 +10439,8 @@
         </p:nvSpPr>
         <p:spPr>
           <a:xfrm>
-            <a:off x="841248" y="4206240"/>
-            <a:ext cx="5715000" cy="530352"/>
+            <a:off x="841248" y="4041648"/>
+            <a:ext cx="4160520" cy="475488"/>
           </a:xfrm>
           <a:prstGeom prst="roundRect">
             <a:avLst>
@@ -10264,8 +10495,8 @@
         </p:blipFill>
         <p:spPr>
           <a:xfrm>
-            <a:off x="987552" y="4352544"/>
-            <a:ext cx="237744" cy="237744"/>
+            <a:off x="969264" y="4178807"/>
+            <a:ext cx="201168" cy="201168"/>
           </a:xfrm>
           <a:prstGeom prst="rect">
             <a:avLst/>
@@ -10280,8 +10511,8 @@
         </p:nvSpPr>
         <p:spPr>
           <a:xfrm>
-            <a:off x="1353312" y="4206240"/>
-            <a:ext cx="5029200" cy="530352"/>
+            <a:off x="1280160" y="4041648"/>
+            <a:ext cx="3593591" cy="475488"/>
           </a:xfrm>
           <a:prstGeom prst="rect">
             <a:avLst/>
@@ -10306,7 +10537,7 @@
               </a:spcAft>
             </a:pPr>
             <a:r>
-              <a:rPr sz="1200" b="0">
+              <a:rPr sz="1050" b="0">
                 <a:solidFill>
                   <a:srgbClr val="1A1A1A"/>
                 </a:solidFill>
@@ -10325,8 +10556,8 @@
         </p:nvSpPr>
         <p:spPr>
           <a:xfrm>
-            <a:off x="841248" y="4809744"/>
-            <a:ext cx="5715000" cy="530352"/>
+            <a:off x="841248" y="4590288"/>
+            <a:ext cx="4160520" cy="475488"/>
           </a:xfrm>
           <a:prstGeom prst="roundRect">
             <a:avLst>
@@ -10381,8 +10612,8 @@
         </p:blipFill>
         <p:spPr>
           <a:xfrm>
-            <a:off x="987552" y="4956048"/>
-            <a:ext cx="237744" cy="237744"/>
+            <a:off x="969264" y="4727447"/>
+            <a:ext cx="201168" cy="201168"/>
           </a:xfrm>
           <a:prstGeom prst="rect">
             <a:avLst/>
@@ -10397,8 +10628,8 @@
         </p:nvSpPr>
         <p:spPr>
           <a:xfrm>
-            <a:off x="1353312" y="4809744"/>
-            <a:ext cx="5029200" cy="530352"/>
+            <a:off x="1280160" y="4590288"/>
+            <a:ext cx="3593591" cy="475488"/>
           </a:xfrm>
           <a:prstGeom prst="rect">
             <a:avLst/>
@@ -10423,7 +10654,7 @@
               </a:spcAft>
             </a:pPr>
             <a:r>
-              <a:rPr sz="1200" b="0">
+              <a:rPr sz="1050" b="0">
                 <a:solidFill>
                   <a:srgbClr val="1A1A1A"/>
                 </a:solidFill>
@@ -10442,8 +10673,8 @@
         </p:nvSpPr>
         <p:spPr>
           <a:xfrm>
-            <a:off x="6812280" y="2395728"/>
-            <a:ext cx="4538167" cy="2944368"/>
+            <a:off x="5385816" y="2692230"/>
+            <a:ext cx="5964631" cy="2150195"/>
           </a:xfrm>
           <a:prstGeom prst="roundRect">
             <a:avLst>
@@ -10482,100 +10713,9 @@
           </a:p>
         </p:txBody>
       </p:sp>
-      <p:sp>
-        <p:nvSpPr>
-          <p:cNvPr id="22" name="Rounded Rectangle 21"/>
-          <p:cNvSpPr/>
-          <p:nvPr/>
-        </p:nvSpPr>
-        <p:spPr>
-          <a:xfrm>
-            <a:off x="7013448" y="2596896"/>
-            <a:ext cx="1298448" cy="310896"/>
-          </a:xfrm>
-          <a:prstGeom prst="roundRect">
-            <a:avLst>
-              <a:gd name="adj" fmla="val 50000"/>
-            </a:avLst>
-          </a:prstGeom>
-          <a:solidFill>
-            <a:srgbClr val="FCECEC"/>
-          </a:solidFill>
-          <a:ln>
-            <a:noFill/>
-          </a:ln>
-          <a:effectLst/>
-        </p:spPr>
-        <p:style>
-          <a:lnRef idx="1">
-            <a:schemeClr val="accent1"/>
-          </a:lnRef>
-          <a:fillRef idx="3">
-            <a:schemeClr val="accent1"/>
-          </a:fillRef>
-          <a:effectRef idx="2">
-            <a:schemeClr val="accent1"/>
-          </a:effectRef>
-          <a:fontRef idx="minor">
-            <a:schemeClr val="lt1"/>
-          </a:fontRef>
-        </p:style>
-        <p:txBody>
-          <a:bodyPr rtlCol="0" anchor="ctr"/>
-          <a:lstStyle/>
-          <a:p>
-            <a:pPr algn="ctr"/>
-          </a:p>
-        </p:txBody>
-      </p:sp>
-      <p:sp>
-        <p:nvSpPr>
-          <p:cNvPr id="23" name="TextBox 22"/>
-          <p:cNvSpPr txBox="1"/>
-          <p:nvPr/>
-        </p:nvSpPr>
-        <p:spPr>
-          <a:xfrm>
-            <a:off x="7013448" y="2596896"/>
-            <a:ext cx="1298448" cy="310896"/>
-          </a:xfrm>
-          <a:prstGeom prst="rect">
-            <a:avLst/>
-          </a:prstGeom>
-          <a:noFill/>
-        </p:spPr>
-        <p:txBody>
-          <a:bodyPr wrap="none" anchor="ctr" lIns="0" rIns="0" tIns="0" bIns="0">
-            <a:spAutoFit/>
-          </a:bodyPr>
-          <a:lstStyle/>
-          <a:p>
-            <a:pPr algn="ctr">
-              <a:lnSpc>
-                <a:spcPct val="106000"/>
-              </a:lnSpc>
-              <a:spcBef>
-                <a:spcPts val="0"/>
-              </a:spcBef>
-              <a:spcAft>
-                <a:spcPts val="0"/>
-              </a:spcAft>
-            </a:pPr>
-            <a:r>
-              <a:rPr sz="850" b="1">
-                <a:solidFill>
-                  <a:srgbClr val="B80000"/>
-                </a:solidFill>
-                <a:latin typeface="Red Hat Display"/>
-              </a:rPr>
-              <a:t>MEDIA PASS</a:t>
-            </a:r>
-          </a:p>
-        </p:txBody>
-      </p:sp>
       <p:pic>
         <p:nvPicPr>
-          <p:cNvPr id="24" name="Picture 23" descr="eye_slate.png"/>
+          <p:cNvPr id="22" name="Picture 21" descr="03-promotion-overlays.png"/>
           <p:cNvPicPr>
             <a:picLocks noChangeAspect="1"/>
           </p:cNvPicPr>
@@ -10589,62 +10729,17 @@
         </p:blipFill>
         <p:spPr>
           <a:xfrm>
-            <a:off x="8843619" y="3108960"/>
-            <a:ext cx="475488" cy="475488"/>
+            <a:off x="5532120" y="2838534"/>
+            <a:ext cx="5672023" cy="1857587"/>
           </a:xfrm>
           <a:prstGeom prst="rect">
             <a:avLst/>
           </a:prstGeom>
         </p:spPr>
       </p:pic>
-      <p:sp>
-        <p:nvSpPr>
-          <p:cNvPr id="25" name="TextBox 24"/>
-          <p:cNvSpPr txBox="1"/>
-          <p:nvPr/>
-        </p:nvSpPr>
-        <p:spPr>
-          <a:xfrm>
-            <a:off x="7050024" y="3721608"/>
-            <a:ext cx="4062679" cy="1481328"/>
-          </a:xfrm>
-          <a:prstGeom prst="rect">
-            <a:avLst/>
-          </a:prstGeom>
-          <a:noFill/>
-        </p:spPr>
-        <p:txBody>
-          <a:bodyPr wrap="square" anchor="t" lIns="0" rIns="0" tIns="0" bIns="0">
-            <a:spAutoFit/>
-          </a:bodyPr>
-          <a:lstStyle/>
-          <a:p>
-            <a:pPr algn="l">
-              <a:lnSpc>
-                <a:spcPct val="120000"/>
-              </a:lnSpc>
-              <a:spcBef>
-                <a:spcPts val="0"/>
-              </a:spcBef>
-              <a:spcAft>
-                <a:spcPts val="0"/>
-              </a:spcAft>
-            </a:pPr>
-            <a:r>
-              <a:rPr sz="950" b="0">
-                <a:solidFill>
-                  <a:srgbClr val="8A9099"/>
-                </a:solidFill>
-                <a:latin typeface="Red Hat Text"/>
-              </a:rPr>
-              <a:t>Reuse concept diagram config-multienv-...-03-promotion-overlays.svg — one base fanning into dev/stage/prod overlays, all carrying the same image digest.</a:t>
-            </a:r>
-          </a:p>
-        </p:txBody>
-      </p:sp>
       <p:cxnSp>
         <p:nvCxnSpPr>
-          <p:cNvPr id="26" name="Connector 25"/>
+          <p:cNvPr id="23" name="Connector 22"/>
           <p:cNvCxnSpPr/>
           <p:nvPr/>
         </p:nvCxnSpPr>
@@ -10680,7 +10775,7 @@
       </p:cxnSp>
       <p:sp>
         <p:nvSpPr>
-          <p:cNvPr id="27" name="TextBox 26"/>
+          <p:cNvPr id="24" name="TextBox 23"/>
           <p:cNvSpPr txBox="1"/>
           <p:nvPr/>
         </p:nvSpPr>
@@ -10725,7 +10820,7 @@
       </p:sp>
       <p:sp>
         <p:nvSpPr>
-          <p:cNvPr id="28" name="TextBox 27"/>
+          <p:cNvPr id="25" name="TextBox 24"/>
           <p:cNvSpPr txBox="1"/>
           <p:nvPr/>
         </p:nvSpPr>
@@ -10945,11 +11040,11 @@
         <p:spPr>
           <a:xfrm>
             <a:off x="841248" y="2395728"/>
-            <a:ext cx="5715000" cy="530352"/>
+            <a:ext cx="5138928" cy="786384"/>
           </a:xfrm>
           <a:prstGeom prst="roundRect">
             <a:avLst>
-              <a:gd name="adj" fmla="val 6000"/>
+              <a:gd name="adj" fmla="val 7000"/>
             </a:avLst>
           </a:prstGeom>
           <a:solidFill>
@@ -10984,9 +11079,55 @@
           </a:p>
         </p:txBody>
       </p:sp>
+      <p:sp>
+        <p:nvSpPr>
+          <p:cNvPr id="7" name="Rounded Rectangle 6"/>
+          <p:cNvSpPr/>
+          <p:nvPr/>
+        </p:nvSpPr>
+        <p:spPr>
+          <a:xfrm>
+            <a:off x="987552" y="2532888"/>
+            <a:ext cx="512064" cy="512064"/>
+          </a:xfrm>
+          <a:prstGeom prst="roundRect">
+            <a:avLst>
+              <a:gd name="adj" fmla="val 26000"/>
+            </a:avLst>
+          </a:prstGeom>
+          <a:solidFill>
+            <a:srgbClr val="EE0000"/>
+          </a:solidFill>
+          <a:ln>
+            <a:noFill/>
+          </a:ln>
+          <a:effectLst/>
+        </p:spPr>
+        <p:style>
+          <a:lnRef idx="1">
+            <a:schemeClr val="accent1"/>
+          </a:lnRef>
+          <a:fillRef idx="3">
+            <a:schemeClr val="accent1"/>
+          </a:fillRef>
+          <a:effectRef idx="2">
+            <a:schemeClr val="accent1"/>
+          </a:effectRef>
+          <a:fontRef idx="minor">
+            <a:schemeClr val="lt1"/>
+          </a:fontRef>
+        </p:style>
+        <p:txBody>
+          <a:bodyPr rtlCol="0" anchor="ctr"/>
+          <a:lstStyle/>
+          <a:p>
+            <a:pPr algn="ctr"/>
+          </a:p>
+        </p:txBody>
+      </p:sp>
       <p:pic>
         <p:nvPicPr>
-          <p:cNvPr id="7" name="Picture 6" descr="check_steel.png"/>
+          <p:cNvPr id="8" name="Picture 7" descr="check_white.png"/>
           <p:cNvPicPr>
             <a:picLocks noChangeAspect="1"/>
           </p:cNvPicPr>
@@ -11000,8 +11141,8 @@
         </p:blipFill>
         <p:spPr>
           <a:xfrm>
-            <a:off x="987552" y="2542032"/>
-            <a:ext cx="237744" cy="237744"/>
+            <a:off x="1110447" y="2655783"/>
+            <a:ext cx="266273" cy="266273"/>
           </a:xfrm>
           <a:prstGeom prst="rect">
             <a:avLst/>
@@ -11010,14 +11151,14 @@
       </p:pic>
       <p:sp>
         <p:nvSpPr>
-          <p:cNvPr id="8" name="TextBox 7"/>
+          <p:cNvPr id="9" name="TextBox 8"/>
           <p:cNvSpPr txBox="1"/>
           <p:nvPr/>
         </p:nvSpPr>
         <p:spPr>
           <a:xfrm>
-            <a:off x="1353312" y="2395728"/>
-            <a:ext cx="5029200" cy="530352"/>
+            <a:off x="1627632" y="2395728"/>
+            <a:ext cx="4206240" cy="786384"/>
           </a:xfrm>
           <a:prstGeom prst="rect">
             <a:avLst/>
@@ -11042,7 +11183,7 @@
               </a:spcAft>
             </a:pPr>
             <a:r>
-              <a:rPr sz="1200" b="0">
+              <a:rPr sz="1150" b="0">
                 <a:solidFill>
                   <a:srgbClr val="1A1A1A"/>
                 </a:solidFill>
@@ -11055,18 +11196,18 @@
       </p:sp>
       <p:sp>
         <p:nvSpPr>
-          <p:cNvPr id="9" name="Rounded Rectangle 8"/>
+          <p:cNvPr id="10" name="Rounded Rectangle 9"/>
           <p:cNvSpPr/>
           <p:nvPr/>
         </p:nvSpPr>
         <p:spPr>
           <a:xfrm>
-            <a:off x="841248" y="2999232"/>
-            <a:ext cx="5715000" cy="530352"/>
+            <a:off x="6254496" y="2395728"/>
+            <a:ext cx="5138928" cy="786384"/>
           </a:xfrm>
           <a:prstGeom prst="roundRect">
             <a:avLst>
-              <a:gd name="adj" fmla="val 6000"/>
+              <a:gd name="adj" fmla="val 7000"/>
             </a:avLst>
           </a:prstGeom>
           <a:solidFill>
@@ -11101,9 +11242,55 @@
           </a:p>
         </p:txBody>
       </p:sp>
+      <p:sp>
+        <p:nvSpPr>
+          <p:cNvPr id="11" name="Rounded Rectangle 10"/>
+          <p:cNvSpPr/>
+          <p:nvPr/>
+        </p:nvSpPr>
+        <p:spPr>
+          <a:xfrm>
+            <a:off x="6400800" y="2532888"/>
+            <a:ext cx="512064" cy="512064"/>
+          </a:xfrm>
+          <a:prstGeom prst="roundRect">
+            <a:avLst>
+              <a:gd name="adj" fmla="val 26000"/>
+            </a:avLst>
+          </a:prstGeom>
+          <a:solidFill>
+            <a:srgbClr val="EE0000"/>
+          </a:solidFill>
+          <a:ln>
+            <a:noFill/>
+          </a:ln>
+          <a:effectLst/>
+        </p:spPr>
+        <p:style>
+          <a:lnRef idx="1">
+            <a:schemeClr val="accent1"/>
+          </a:lnRef>
+          <a:fillRef idx="3">
+            <a:schemeClr val="accent1"/>
+          </a:fillRef>
+          <a:effectRef idx="2">
+            <a:schemeClr val="accent1"/>
+          </a:effectRef>
+          <a:fontRef idx="minor">
+            <a:schemeClr val="lt1"/>
+          </a:fontRef>
+        </p:style>
+        <p:txBody>
+          <a:bodyPr rtlCol="0" anchor="ctr"/>
+          <a:lstStyle/>
+          <a:p>
+            <a:pPr algn="ctr"/>
+          </a:p>
+        </p:txBody>
+      </p:sp>
       <p:pic>
         <p:nvPicPr>
-          <p:cNvPr id="10" name="Picture 9" descr="check_steel.png"/>
+          <p:cNvPr id="12" name="Picture 11" descr="check_white.png"/>
           <p:cNvPicPr>
             <a:picLocks noChangeAspect="1"/>
           </p:cNvPicPr>
@@ -11117,8 +11304,8 @@
         </p:blipFill>
         <p:spPr>
           <a:xfrm>
-            <a:off x="987552" y="3145536"/>
-            <a:ext cx="237744" cy="237744"/>
+            <a:off x="6523695" y="2655783"/>
+            <a:ext cx="266273" cy="266273"/>
           </a:xfrm>
           <a:prstGeom prst="rect">
             <a:avLst/>
@@ -11127,14 +11314,14 @@
       </p:pic>
       <p:sp>
         <p:nvSpPr>
-          <p:cNvPr id="11" name="TextBox 10"/>
+          <p:cNvPr id="13" name="TextBox 12"/>
           <p:cNvSpPr txBox="1"/>
           <p:nvPr/>
         </p:nvSpPr>
         <p:spPr>
           <a:xfrm>
-            <a:off x="1353312" y="2999232"/>
-            <a:ext cx="5029200" cy="530352"/>
+            <a:off x="7040880" y="2395728"/>
+            <a:ext cx="4206240" cy="786384"/>
           </a:xfrm>
           <a:prstGeom prst="rect">
             <a:avLst/>
@@ -11159,7 +11346,7 @@
               </a:spcAft>
             </a:pPr>
             <a:r>
-              <a:rPr sz="1200" b="0">
+              <a:rPr sz="1150" b="0">
                 <a:solidFill>
                   <a:srgbClr val="1A1A1A"/>
                 </a:solidFill>
@@ -11172,18 +11359,18 @@
       </p:sp>
       <p:sp>
         <p:nvSpPr>
-          <p:cNvPr id="12" name="Rounded Rectangle 11"/>
+          <p:cNvPr id="14" name="Rounded Rectangle 13"/>
           <p:cNvSpPr/>
           <p:nvPr/>
         </p:nvSpPr>
         <p:spPr>
           <a:xfrm>
-            <a:off x="841248" y="3602736"/>
-            <a:ext cx="5715000" cy="530352"/>
+            <a:off x="841248" y="3328416"/>
+            <a:ext cx="5138928" cy="786384"/>
           </a:xfrm>
           <a:prstGeom prst="roundRect">
             <a:avLst>
-              <a:gd name="adj" fmla="val 6000"/>
+              <a:gd name="adj" fmla="val 7000"/>
             </a:avLst>
           </a:prstGeom>
           <a:solidFill>
@@ -11218,9 +11405,55 @@
           </a:p>
         </p:txBody>
       </p:sp>
+      <p:sp>
+        <p:nvSpPr>
+          <p:cNvPr id="15" name="Rounded Rectangle 14"/>
+          <p:cNvSpPr/>
+          <p:nvPr/>
+        </p:nvSpPr>
+        <p:spPr>
+          <a:xfrm>
+            <a:off x="987552" y="3465576"/>
+            <a:ext cx="512064" cy="512064"/>
+          </a:xfrm>
+          <a:prstGeom prst="roundRect">
+            <a:avLst>
+              <a:gd name="adj" fmla="val 26000"/>
+            </a:avLst>
+          </a:prstGeom>
+          <a:solidFill>
+            <a:srgbClr val="EE0000"/>
+          </a:solidFill>
+          <a:ln>
+            <a:noFill/>
+          </a:ln>
+          <a:effectLst/>
+        </p:spPr>
+        <p:style>
+          <a:lnRef idx="1">
+            <a:schemeClr val="accent1"/>
+          </a:lnRef>
+          <a:fillRef idx="3">
+            <a:schemeClr val="accent1"/>
+          </a:fillRef>
+          <a:effectRef idx="2">
+            <a:schemeClr val="accent1"/>
+          </a:effectRef>
+          <a:fontRef idx="minor">
+            <a:schemeClr val="lt1"/>
+          </a:fontRef>
+        </p:style>
+        <p:txBody>
+          <a:bodyPr rtlCol="0" anchor="ctr"/>
+          <a:lstStyle/>
+          <a:p>
+            <a:pPr algn="ctr"/>
+          </a:p>
+        </p:txBody>
+      </p:sp>
       <p:pic>
         <p:nvPicPr>
-          <p:cNvPr id="13" name="Picture 12" descr="check_steel.png"/>
+          <p:cNvPr id="16" name="Picture 15" descr="check_white.png"/>
           <p:cNvPicPr>
             <a:picLocks noChangeAspect="1"/>
           </p:cNvPicPr>
@@ -11234,8 +11467,8 @@
         </p:blipFill>
         <p:spPr>
           <a:xfrm>
-            <a:off x="987552" y="3749040"/>
-            <a:ext cx="237744" cy="237744"/>
+            <a:off x="1110447" y="3588471"/>
+            <a:ext cx="266273" cy="266273"/>
           </a:xfrm>
           <a:prstGeom prst="rect">
             <a:avLst/>
@@ -11244,14 +11477,14 @@
       </p:pic>
       <p:sp>
         <p:nvSpPr>
-          <p:cNvPr id="14" name="TextBox 13"/>
+          <p:cNvPr id="17" name="TextBox 16"/>
           <p:cNvSpPr txBox="1"/>
           <p:nvPr/>
         </p:nvSpPr>
         <p:spPr>
           <a:xfrm>
-            <a:off x="1353312" y="3602736"/>
-            <a:ext cx="5029200" cy="530352"/>
+            <a:off x="1627632" y="3328416"/>
+            <a:ext cx="4206240" cy="786384"/>
           </a:xfrm>
           <a:prstGeom prst="rect">
             <a:avLst/>
@@ -11276,7 +11509,7 @@
               </a:spcAft>
             </a:pPr>
             <a:r>
-              <a:rPr sz="1200" b="0">
+              <a:rPr sz="1150" b="0">
                 <a:solidFill>
                   <a:srgbClr val="1A1A1A"/>
                 </a:solidFill>
@@ -11289,18 +11522,18 @@
       </p:sp>
       <p:sp>
         <p:nvSpPr>
-          <p:cNvPr id="15" name="Rounded Rectangle 14"/>
+          <p:cNvPr id="18" name="Rounded Rectangle 17"/>
           <p:cNvSpPr/>
           <p:nvPr/>
         </p:nvSpPr>
         <p:spPr>
           <a:xfrm>
-            <a:off x="841248" y="4206240"/>
-            <a:ext cx="5715000" cy="530352"/>
+            <a:off x="6254496" y="3328416"/>
+            <a:ext cx="5138928" cy="786384"/>
           </a:xfrm>
           <a:prstGeom prst="roundRect">
             <a:avLst>
-              <a:gd name="adj" fmla="val 6000"/>
+              <a:gd name="adj" fmla="val 7000"/>
             </a:avLst>
           </a:prstGeom>
           <a:solidFill>
@@ -11335,9 +11568,55 @@
           </a:p>
         </p:txBody>
       </p:sp>
+      <p:sp>
+        <p:nvSpPr>
+          <p:cNvPr id="19" name="Rounded Rectangle 18"/>
+          <p:cNvSpPr/>
+          <p:nvPr/>
+        </p:nvSpPr>
+        <p:spPr>
+          <a:xfrm>
+            <a:off x="6400800" y="3465576"/>
+            <a:ext cx="512064" cy="512064"/>
+          </a:xfrm>
+          <a:prstGeom prst="roundRect">
+            <a:avLst>
+              <a:gd name="adj" fmla="val 26000"/>
+            </a:avLst>
+          </a:prstGeom>
+          <a:solidFill>
+            <a:srgbClr val="EE0000"/>
+          </a:solidFill>
+          <a:ln>
+            <a:noFill/>
+          </a:ln>
+          <a:effectLst/>
+        </p:spPr>
+        <p:style>
+          <a:lnRef idx="1">
+            <a:schemeClr val="accent1"/>
+          </a:lnRef>
+          <a:fillRef idx="3">
+            <a:schemeClr val="accent1"/>
+          </a:fillRef>
+          <a:effectRef idx="2">
+            <a:schemeClr val="accent1"/>
+          </a:effectRef>
+          <a:fontRef idx="minor">
+            <a:schemeClr val="lt1"/>
+          </a:fontRef>
+        </p:style>
+        <p:txBody>
+          <a:bodyPr rtlCol="0" anchor="ctr"/>
+          <a:lstStyle/>
+          <a:p>
+            <a:pPr algn="ctr"/>
+          </a:p>
+        </p:txBody>
+      </p:sp>
       <p:pic>
         <p:nvPicPr>
-          <p:cNvPr id="16" name="Picture 15" descr="check_steel.png"/>
+          <p:cNvPr id="20" name="Picture 19" descr="check_white.png"/>
           <p:cNvPicPr>
             <a:picLocks noChangeAspect="1"/>
           </p:cNvPicPr>
@@ -11351,8 +11630,8 @@
         </p:blipFill>
         <p:spPr>
           <a:xfrm>
-            <a:off x="987552" y="4352544"/>
-            <a:ext cx="237744" cy="237744"/>
+            <a:off x="6523695" y="3588471"/>
+            <a:ext cx="266273" cy="266273"/>
           </a:xfrm>
           <a:prstGeom prst="rect">
             <a:avLst/>
@@ -11361,14 +11640,14 @@
       </p:pic>
       <p:sp>
         <p:nvSpPr>
-          <p:cNvPr id="17" name="TextBox 16"/>
+          <p:cNvPr id="21" name="TextBox 20"/>
           <p:cNvSpPr txBox="1"/>
           <p:nvPr/>
         </p:nvSpPr>
         <p:spPr>
           <a:xfrm>
-            <a:off x="1353312" y="4206240"/>
-            <a:ext cx="5029200" cy="530352"/>
+            <a:off x="7040880" y="3328416"/>
+            <a:ext cx="4206240" cy="786384"/>
           </a:xfrm>
           <a:prstGeom prst="rect">
             <a:avLst/>
@@ -11393,7 +11672,7 @@
               </a:spcAft>
             </a:pPr>
             <a:r>
-              <a:rPr sz="1200" b="0">
+              <a:rPr sz="1150" b="0">
                 <a:solidFill>
                   <a:srgbClr val="1A1A1A"/>
                 </a:solidFill>
@@ -11406,18 +11685,18 @@
       </p:sp>
       <p:sp>
         <p:nvSpPr>
-          <p:cNvPr id="18" name="Rounded Rectangle 17"/>
+          <p:cNvPr id="22" name="Rounded Rectangle 21"/>
           <p:cNvSpPr/>
           <p:nvPr/>
         </p:nvSpPr>
         <p:spPr>
           <a:xfrm>
-            <a:off x="841248" y="4809744"/>
-            <a:ext cx="5715000" cy="530352"/>
+            <a:off x="841248" y="4261104"/>
+            <a:ext cx="5138928" cy="786384"/>
           </a:xfrm>
           <a:prstGeom prst="roundRect">
             <a:avLst>
-              <a:gd name="adj" fmla="val 6000"/>
+              <a:gd name="adj" fmla="val 7000"/>
             </a:avLst>
           </a:prstGeom>
           <a:solidFill>
@@ -11452,9 +11731,55 @@
           </a:p>
         </p:txBody>
       </p:sp>
+      <p:sp>
+        <p:nvSpPr>
+          <p:cNvPr id="23" name="Rounded Rectangle 22"/>
+          <p:cNvSpPr/>
+          <p:nvPr/>
+        </p:nvSpPr>
+        <p:spPr>
+          <a:xfrm>
+            <a:off x="987552" y="4398264"/>
+            <a:ext cx="512064" cy="512064"/>
+          </a:xfrm>
+          <a:prstGeom prst="roundRect">
+            <a:avLst>
+              <a:gd name="adj" fmla="val 26000"/>
+            </a:avLst>
+          </a:prstGeom>
+          <a:solidFill>
+            <a:srgbClr val="EE0000"/>
+          </a:solidFill>
+          <a:ln>
+            <a:noFill/>
+          </a:ln>
+          <a:effectLst/>
+        </p:spPr>
+        <p:style>
+          <a:lnRef idx="1">
+            <a:schemeClr val="accent1"/>
+          </a:lnRef>
+          <a:fillRef idx="3">
+            <a:schemeClr val="accent1"/>
+          </a:fillRef>
+          <a:effectRef idx="2">
+            <a:schemeClr val="accent1"/>
+          </a:effectRef>
+          <a:fontRef idx="minor">
+            <a:schemeClr val="lt1"/>
+          </a:fontRef>
+        </p:style>
+        <p:txBody>
+          <a:bodyPr rtlCol="0" anchor="ctr"/>
+          <a:lstStyle/>
+          <a:p>
+            <a:pPr algn="ctr"/>
+          </a:p>
+        </p:txBody>
+      </p:sp>
       <p:pic>
         <p:nvPicPr>
-          <p:cNvPr id="19" name="Picture 18" descr="check_steel.png"/>
+          <p:cNvPr id="24" name="Picture 23" descr="check_white.png"/>
           <p:cNvPicPr>
             <a:picLocks noChangeAspect="1"/>
           </p:cNvPicPr>
@@ -11468,8 +11793,8 @@
         </p:blipFill>
         <p:spPr>
           <a:xfrm>
-            <a:off x="987552" y="4956048"/>
-            <a:ext cx="237744" cy="237744"/>
+            <a:off x="1110447" y="4521159"/>
+            <a:ext cx="266273" cy="266273"/>
           </a:xfrm>
           <a:prstGeom prst="rect">
             <a:avLst/>
@@ -11478,14 +11803,14 @@
       </p:pic>
       <p:sp>
         <p:nvSpPr>
-          <p:cNvPr id="20" name="TextBox 19"/>
+          <p:cNvPr id="25" name="TextBox 24"/>
           <p:cNvSpPr txBox="1"/>
           <p:nvPr/>
         </p:nvSpPr>
         <p:spPr>
           <a:xfrm>
-            <a:off x="1353312" y="4809744"/>
-            <a:ext cx="5029200" cy="530352"/>
+            <a:off x="1627632" y="4261104"/>
+            <a:ext cx="4206240" cy="786384"/>
           </a:xfrm>
           <a:prstGeom prst="rect">
             <a:avLst/>
@@ -11510,221 +11835,13 @@
               </a:spcAft>
             </a:pPr>
             <a:r>
-              <a:rPr sz="1200" b="0">
+              <a:rPr sz="1150" b="0">
                 <a:solidFill>
                   <a:srgbClr val="1A1A1A"/>
                 </a:solidFill>
                 <a:latin typeface="Red Hat Text"/>
               </a:rPr>
               <a:t>Promote the same image to stage and prod</a:t>
-            </a:r>
-          </a:p>
-        </p:txBody>
-      </p:sp>
-      <p:sp>
-        <p:nvSpPr>
-          <p:cNvPr id="21" name="Rounded Rectangle 20"/>
-          <p:cNvSpPr/>
-          <p:nvPr/>
-        </p:nvSpPr>
-        <p:spPr>
-          <a:xfrm>
-            <a:off x="6812280" y="2395728"/>
-            <a:ext cx="4538167" cy="2944368"/>
-          </a:xfrm>
-          <a:prstGeom prst="roundRect">
-            <a:avLst>
-              <a:gd name="adj" fmla="val 4000"/>
-            </a:avLst>
-          </a:prstGeom>
-          <a:solidFill>
-            <a:srgbClr val="FFFFFF"/>
-          </a:solidFill>
-          <a:ln w="15240">
-            <a:solidFill>
-              <a:srgbClr val="DDE1E6"/>
-            </a:solidFill>
-          </a:ln>
-          <a:effectLst/>
-        </p:spPr>
-        <p:style>
-          <a:lnRef idx="1">
-            <a:schemeClr val="accent1"/>
-          </a:lnRef>
-          <a:fillRef idx="3">
-            <a:schemeClr val="accent1"/>
-          </a:fillRef>
-          <a:effectRef idx="2">
-            <a:schemeClr val="accent1"/>
-          </a:effectRef>
-          <a:fontRef idx="minor">
-            <a:schemeClr val="lt1"/>
-          </a:fontRef>
-        </p:style>
-        <p:txBody>
-          <a:bodyPr rtlCol="0" anchor="ctr"/>
-          <a:lstStyle/>
-          <a:p>
-            <a:pPr algn="ctr"/>
-          </a:p>
-        </p:txBody>
-      </p:sp>
-      <p:sp>
-        <p:nvSpPr>
-          <p:cNvPr id="22" name="Rounded Rectangle 21"/>
-          <p:cNvSpPr/>
-          <p:nvPr/>
-        </p:nvSpPr>
-        <p:spPr>
-          <a:xfrm>
-            <a:off x="7013448" y="2596896"/>
-            <a:ext cx="1298448" cy="310896"/>
-          </a:xfrm>
-          <a:prstGeom prst="roundRect">
-            <a:avLst>
-              <a:gd name="adj" fmla="val 50000"/>
-            </a:avLst>
-          </a:prstGeom>
-          <a:solidFill>
-            <a:srgbClr val="FCECEC"/>
-          </a:solidFill>
-          <a:ln>
-            <a:noFill/>
-          </a:ln>
-          <a:effectLst/>
-        </p:spPr>
-        <p:style>
-          <a:lnRef idx="1">
-            <a:schemeClr val="accent1"/>
-          </a:lnRef>
-          <a:fillRef idx="3">
-            <a:schemeClr val="accent1"/>
-          </a:fillRef>
-          <a:effectRef idx="2">
-            <a:schemeClr val="accent1"/>
-          </a:effectRef>
-          <a:fontRef idx="minor">
-            <a:schemeClr val="lt1"/>
-          </a:fontRef>
-        </p:style>
-        <p:txBody>
-          <a:bodyPr rtlCol="0" anchor="ctr"/>
-          <a:lstStyle/>
-          <a:p>
-            <a:pPr algn="ctr"/>
-          </a:p>
-        </p:txBody>
-      </p:sp>
-      <p:sp>
-        <p:nvSpPr>
-          <p:cNvPr id="23" name="TextBox 22"/>
-          <p:cNvSpPr txBox="1"/>
-          <p:nvPr/>
-        </p:nvSpPr>
-        <p:spPr>
-          <a:xfrm>
-            <a:off x="7013448" y="2596896"/>
-            <a:ext cx="1298448" cy="310896"/>
-          </a:xfrm>
-          <a:prstGeom prst="rect">
-            <a:avLst/>
-          </a:prstGeom>
-          <a:noFill/>
-        </p:spPr>
-        <p:txBody>
-          <a:bodyPr wrap="none" anchor="ctr" lIns="0" rIns="0" tIns="0" bIns="0">
-            <a:spAutoFit/>
-          </a:bodyPr>
-          <a:lstStyle/>
-          <a:p>
-            <a:pPr algn="ctr">
-              <a:lnSpc>
-                <a:spcPct val="106000"/>
-              </a:lnSpc>
-              <a:spcBef>
-                <a:spcPts val="0"/>
-              </a:spcBef>
-              <a:spcAft>
-                <a:spcPts val="0"/>
-              </a:spcAft>
-            </a:pPr>
-            <a:r>
-              <a:rPr sz="850" b="1">
-                <a:solidFill>
-                  <a:srgbClr val="B80000"/>
-                </a:solidFill>
-                <a:latin typeface="Red Hat Display"/>
-              </a:rPr>
-              <a:t>MEDIA PASS</a:t>
-            </a:r>
-          </a:p>
-        </p:txBody>
-      </p:sp>
-      <p:pic>
-        <p:nvPicPr>
-          <p:cNvPr id="24" name="Picture 23" descr="eye_slate.png"/>
-          <p:cNvPicPr>
-            <a:picLocks noChangeAspect="1"/>
-          </p:cNvPicPr>
-          <p:nvPr/>
-        </p:nvPicPr>
-        <p:blipFill>
-          <a:blip r:embed="rId4"/>
-          <a:stretch>
-            <a:fillRect/>
-          </a:stretch>
-        </p:blipFill>
-        <p:spPr>
-          <a:xfrm>
-            <a:off x="8843619" y="3108960"/>
-            <a:ext cx="475488" cy="475488"/>
-          </a:xfrm>
-          <a:prstGeom prst="rect">
-            <a:avLst/>
-          </a:prstGeom>
-        </p:spPr>
-      </p:pic>
-      <p:sp>
-        <p:nvSpPr>
-          <p:cNvPr id="25" name="TextBox 24"/>
-          <p:cNvSpPr txBox="1"/>
-          <p:nvPr/>
-        </p:nvSpPr>
-        <p:spPr>
-          <a:xfrm>
-            <a:off x="7050024" y="3721608"/>
-            <a:ext cx="4062679" cy="1481328"/>
-          </a:xfrm>
-          <a:prstGeom prst="rect">
-            <a:avLst/>
-          </a:prstGeom>
-          <a:noFill/>
-        </p:spPr>
-        <p:txBody>
-          <a:bodyPr wrap="square" anchor="t" lIns="0" rIns="0" tIns="0" bIns="0">
-            <a:spAutoFit/>
-          </a:bodyPr>
-          <a:lstStyle/>
-          <a:p>
-            <a:pPr algn="l">
-              <a:lnSpc>
-                <a:spcPct val="120000"/>
-              </a:lnSpc>
-              <a:spcBef>
-                <a:spcPts val="0"/>
-              </a:spcBef>
-              <a:spcAft>
-                <a:spcPts val="0"/>
-              </a:spcAft>
-            </a:pPr>
-            <a:r>
-              <a:rPr sz="950" b="0">
-                <a:solidFill>
-                  <a:srgbClr val="8A9099"/>
-                </a:solidFill>
-                <a:latin typeface="Red Hat Text"/>
-              </a:rPr>
-              <a:t>Numbered arc strip: break → ConfigMap → Secret → probes → quota → promote.</a:t>
             </a:r>
           </a:p>
         </p:txBody>
@@ -12032,11 +12149,11 @@
         <p:spPr>
           <a:xfrm>
             <a:off x="841248" y="2395728"/>
-            <a:ext cx="5715000" cy="530352"/>
+            <a:ext cx="5138928" cy="786384"/>
           </a:xfrm>
           <a:prstGeom prst="roundRect">
             <a:avLst>
-              <a:gd name="adj" fmla="val 6000"/>
+              <a:gd name="adj" fmla="val 7000"/>
             </a:avLst>
           </a:prstGeom>
           <a:solidFill>
@@ -12071,9 +12188,55 @@
           </a:p>
         </p:txBody>
       </p:sp>
+      <p:sp>
+        <p:nvSpPr>
+          <p:cNvPr id="7" name="Rounded Rectangle 6"/>
+          <p:cNvSpPr/>
+          <p:nvPr/>
+        </p:nvSpPr>
+        <p:spPr>
+          <a:xfrm>
+            <a:off x="987552" y="2532888"/>
+            <a:ext cx="512064" cy="512064"/>
+          </a:xfrm>
+          <a:prstGeom prst="roundRect">
+            <a:avLst>
+              <a:gd name="adj" fmla="val 26000"/>
+            </a:avLst>
+          </a:prstGeom>
+          <a:solidFill>
+            <a:srgbClr val="EE0000"/>
+          </a:solidFill>
+          <a:ln>
+            <a:noFill/>
+          </a:ln>
+          <a:effectLst/>
+        </p:spPr>
+        <p:style>
+          <a:lnRef idx="1">
+            <a:schemeClr val="accent1"/>
+          </a:lnRef>
+          <a:fillRef idx="3">
+            <a:schemeClr val="accent1"/>
+          </a:fillRef>
+          <a:effectRef idx="2">
+            <a:schemeClr val="accent1"/>
+          </a:effectRef>
+          <a:fontRef idx="minor">
+            <a:schemeClr val="lt1"/>
+          </a:fontRef>
+        </p:style>
+        <p:txBody>
+          <a:bodyPr rtlCol="0" anchor="ctr"/>
+          <a:lstStyle/>
+          <a:p>
+            <a:pPr algn="ctr"/>
+          </a:p>
+        </p:txBody>
+      </p:sp>
       <p:pic>
         <p:nvPicPr>
-          <p:cNvPr id="7" name="Picture 6" descr="check_steel.png"/>
+          <p:cNvPr id="8" name="Picture 7" descr="check_white.png"/>
           <p:cNvPicPr>
             <a:picLocks noChangeAspect="1"/>
           </p:cNvPicPr>
@@ -12087,8 +12250,8 @@
         </p:blipFill>
         <p:spPr>
           <a:xfrm>
-            <a:off x="987552" y="2542032"/>
-            <a:ext cx="237744" cy="237744"/>
+            <a:off x="1110447" y="2655783"/>
+            <a:ext cx="266273" cy="266273"/>
           </a:xfrm>
           <a:prstGeom prst="rect">
             <a:avLst/>
@@ -12097,14 +12260,14 @@
       </p:pic>
       <p:sp>
         <p:nvSpPr>
-          <p:cNvPr id="8" name="TextBox 7"/>
+          <p:cNvPr id="9" name="TextBox 8"/>
           <p:cNvSpPr txBox="1"/>
           <p:nvPr/>
         </p:nvSpPr>
         <p:spPr>
           <a:xfrm>
-            <a:off x="1353312" y="2395728"/>
-            <a:ext cx="5029200" cy="530352"/>
+            <a:off x="1627632" y="2395728"/>
+            <a:ext cx="4206240" cy="786384"/>
           </a:xfrm>
           <a:prstGeom prst="rect">
             <a:avLst/>
@@ -12129,7 +12292,7 @@
               </a:spcAft>
             </a:pPr>
             <a:r>
-              <a:rPr sz="1200" b="0">
+              <a:rPr sz="1150" b="0">
                 <a:solidFill>
                   <a:srgbClr val="1A1A1A"/>
                 </a:solidFill>
@@ -12142,18 +12305,18 @@
       </p:sp>
       <p:sp>
         <p:nvSpPr>
-          <p:cNvPr id="9" name="Rounded Rectangle 8"/>
+          <p:cNvPr id="10" name="Rounded Rectangle 9"/>
           <p:cNvSpPr/>
           <p:nvPr/>
         </p:nvSpPr>
         <p:spPr>
           <a:xfrm>
-            <a:off x="841248" y="2999232"/>
-            <a:ext cx="5715000" cy="530352"/>
+            <a:off x="6254496" y="2395728"/>
+            <a:ext cx="5138928" cy="786384"/>
           </a:xfrm>
           <a:prstGeom prst="roundRect">
             <a:avLst>
-              <a:gd name="adj" fmla="val 6000"/>
+              <a:gd name="adj" fmla="val 7000"/>
             </a:avLst>
           </a:prstGeom>
           <a:solidFill>
@@ -12188,9 +12351,55 @@
           </a:p>
         </p:txBody>
       </p:sp>
+      <p:sp>
+        <p:nvSpPr>
+          <p:cNvPr id="11" name="Rounded Rectangle 10"/>
+          <p:cNvSpPr/>
+          <p:nvPr/>
+        </p:nvSpPr>
+        <p:spPr>
+          <a:xfrm>
+            <a:off x="6400800" y="2532888"/>
+            <a:ext cx="512064" cy="512064"/>
+          </a:xfrm>
+          <a:prstGeom prst="roundRect">
+            <a:avLst>
+              <a:gd name="adj" fmla="val 26000"/>
+            </a:avLst>
+          </a:prstGeom>
+          <a:solidFill>
+            <a:srgbClr val="EE0000"/>
+          </a:solidFill>
+          <a:ln>
+            <a:noFill/>
+          </a:ln>
+          <a:effectLst/>
+        </p:spPr>
+        <p:style>
+          <a:lnRef idx="1">
+            <a:schemeClr val="accent1"/>
+          </a:lnRef>
+          <a:fillRef idx="3">
+            <a:schemeClr val="accent1"/>
+          </a:fillRef>
+          <a:effectRef idx="2">
+            <a:schemeClr val="accent1"/>
+          </a:effectRef>
+          <a:fontRef idx="minor">
+            <a:schemeClr val="lt1"/>
+          </a:fontRef>
+        </p:style>
+        <p:txBody>
+          <a:bodyPr rtlCol="0" anchor="ctr"/>
+          <a:lstStyle/>
+          <a:p>
+            <a:pPr algn="ctr"/>
+          </a:p>
+        </p:txBody>
+      </p:sp>
       <p:pic>
         <p:nvPicPr>
-          <p:cNvPr id="10" name="Picture 9" descr="check_steel.png"/>
+          <p:cNvPr id="12" name="Picture 11" descr="check_white.png"/>
           <p:cNvPicPr>
             <a:picLocks noChangeAspect="1"/>
           </p:cNvPicPr>
@@ -12204,8 +12413,8 @@
         </p:blipFill>
         <p:spPr>
           <a:xfrm>
-            <a:off x="987552" y="3145536"/>
-            <a:ext cx="237744" cy="237744"/>
+            <a:off x="6523695" y="2655783"/>
+            <a:ext cx="266273" cy="266273"/>
           </a:xfrm>
           <a:prstGeom prst="rect">
             <a:avLst/>
@@ -12214,14 +12423,14 @@
       </p:pic>
       <p:sp>
         <p:nvSpPr>
-          <p:cNvPr id="11" name="TextBox 10"/>
+          <p:cNvPr id="13" name="TextBox 12"/>
           <p:cNvSpPr txBox="1"/>
           <p:nvPr/>
         </p:nvSpPr>
         <p:spPr>
           <a:xfrm>
-            <a:off x="1353312" y="2999232"/>
-            <a:ext cx="5029200" cy="530352"/>
+            <a:off x="7040880" y="2395728"/>
+            <a:ext cx="4206240" cy="786384"/>
           </a:xfrm>
           <a:prstGeom prst="rect">
             <a:avLst/>
@@ -12246,7 +12455,7 @@
               </a:spcAft>
             </a:pPr>
             <a:r>
-              <a:rPr sz="1200" b="0">
+              <a:rPr sz="1150" b="0">
                 <a:solidFill>
                   <a:srgbClr val="1A1A1A"/>
                 </a:solidFill>
@@ -12259,18 +12468,18 @@
       </p:sp>
       <p:sp>
         <p:nvSpPr>
-          <p:cNvPr id="12" name="Rounded Rectangle 11"/>
+          <p:cNvPr id="14" name="Rounded Rectangle 13"/>
           <p:cNvSpPr/>
           <p:nvPr/>
         </p:nvSpPr>
         <p:spPr>
           <a:xfrm>
-            <a:off x="841248" y="3602736"/>
-            <a:ext cx="5715000" cy="530352"/>
+            <a:off x="841248" y="3328416"/>
+            <a:ext cx="5138928" cy="786384"/>
           </a:xfrm>
           <a:prstGeom prst="roundRect">
             <a:avLst>
-              <a:gd name="adj" fmla="val 6000"/>
+              <a:gd name="adj" fmla="val 7000"/>
             </a:avLst>
           </a:prstGeom>
           <a:solidFill>
@@ -12305,9 +12514,55 @@
           </a:p>
         </p:txBody>
       </p:sp>
+      <p:sp>
+        <p:nvSpPr>
+          <p:cNvPr id="15" name="Rounded Rectangle 14"/>
+          <p:cNvSpPr/>
+          <p:nvPr/>
+        </p:nvSpPr>
+        <p:spPr>
+          <a:xfrm>
+            <a:off x="987552" y="3465576"/>
+            <a:ext cx="512064" cy="512064"/>
+          </a:xfrm>
+          <a:prstGeom prst="roundRect">
+            <a:avLst>
+              <a:gd name="adj" fmla="val 26000"/>
+            </a:avLst>
+          </a:prstGeom>
+          <a:solidFill>
+            <a:srgbClr val="EE0000"/>
+          </a:solidFill>
+          <a:ln>
+            <a:noFill/>
+          </a:ln>
+          <a:effectLst/>
+        </p:spPr>
+        <p:style>
+          <a:lnRef idx="1">
+            <a:schemeClr val="accent1"/>
+          </a:lnRef>
+          <a:fillRef idx="3">
+            <a:schemeClr val="accent1"/>
+          </a:fillRef>
+          <a:effectRef idx="2">
+            <a:schemeClr val="accent1"/>
+          </a:effectRef>
+          <a:fontRef idx="minor">
+            <a:schemeClr val="lt1"/>
+          </a:fontRef>
+        </p:style>
+        <p:txBody>
+          <a:bodyPr rtlCol="0" anchor="ctr"/>
+          <a:lstStyle/>
+          <a:p>
+            <a:pPr algn="ctr"/>
+          </a:p>
+        </p:txBody>
+      </p:sp>
       <p:pic>
         <p:nvPicPr>
-          <p:cNvPr id="13" name="Picture 12" descr="check_steel.png"/>
+          <p:cNvPr id="16" name="Picture 15" descr="check_white.png"/>
           <p:cNvPicPr>
             <a:picLocks noChangeAspect="1"/>
           </p:cNvPicPr>
@@ -12321,8 +12576,8 @@
         </p:blipFill>
         <p:spPr>
           <a:xfrm>
-            <a:off x="987552" y="3749040"/>
-            <a:ext cx="237744" cy="237744"/>
+            <a:off x="1110447" y="3588471"/>
+            <a:ext cx="266273" cy="266273"/>
           </a:xfrm>
           <a:prstGeom prst="rect">
             <a:avLst/>
@@ -12331,14 +12586,14 @@
       </p:pic>
       <p:sp>
         <p:nvSpPr>
-          <p:cNvPr id="14" name="TextBox 13"/>
+          <p:cNvPr id="17" name="TextBox 16"/>
           <p:cNvSpPr txBox="1"/>
           <p:nvPr/>
         </p:nvSpPr>
         <p:spPr>
           <a:xfrm>
-            <a:off x="1353312" y="3602736"/>
-            <a:ext cx="5029200" cy="530352"/>
+            <a:off x="1627632" y="3328416"/>
+            <a:ext cx="4206240" cy="786384"/>
           </a:xfrm>
           <a:prstGeom prst="rect">
             <a:avLst/>
@@ -12363,7 +12618,7 @@
               </a:spcAft>
             </a:pPr>
             <a:r>
-              <a:rPr sz="1200" b="0">
+              <a:rPr sz="1150" b="0">
                 <a:solidFill>
                   <a:srgbClr val="1A1A1A"/>
                 </a:solidFill>
@@ -12376,18 +12631,18 @@
       </p:sp>
       <p:sp>
         <p:nvSpPr>
-          <p:cNvPr id="15" name="Rounded Rectangle 14"/>
+          <p:cNvPr id="18" name="Rounded Rectangle 17"/>
           <p:cNvSpPr/>
           <p:nvPr/>
         </p:nvSpPr>
         <p:spPr>
           <a:xfrm>
-            <a:off x="841248" y="4206240"/>
-            <a:ext cx="5715000" cy="530352"/>
+            <a:off x="6254496" y="3328416"/>
+            <a:ext cx="5138928" cy="786384"/>
           </a:xfrm>
           <a:prstGeom prst="roundRect">
             <a:avLst>
-              <a:gd name="adj" fmla="val 6000"/>
+              <a:gd name="adj" fmla="val 7000"/>
             </a:avLst>
           </a:prstGeom>
           <a:solidFill>
@@ -12422,9 +12677,55 @@
           </a:p>
         </p:txBody>
       </p:sp>
+      <p:sp>
+        <p:nvSpPr>
+          <p:cNvPr id="19" name="Rounded Rectangle 18"/>
+          <p:cNvSpPr/>
+          <p:nvPr/>
+        </p:nvSpPr>
+        <p:spPr>
+          <a:xfrm>
+            <a:off x="6400800" y="3465576"/>
+            <a:ext cx="512064" cy="512064"/>
+          </a:xfrm>
+          <a:prstGeom prst="roundRect">
+            <a:avLst>
+              <a:gd name="adj" fmla="val 26000"/>
+            </a:avLst>
+          </a:prstGeom>
+          <a:solidFill>
+            <a:srgbClr val="EE0000"/>
+          </a:solidFill>
+          <a:ln>
+            <a:noFill/>
+          </a:ln>
+          <a:effectLst/>
+        </p:spPr>
+        <p:style>
+          <a:lnRef idx="1">
+            <a:schemeClr val="accent1"/>
+          </a:lnRef>
+          <a:fillRef idx="3">
+            <a:schemeClr val="accent1"/>
+          </a:fillRef>
+          <a:effectRef idx="2">
+            <a:schemeClr val="accent1"/>
+          </a:effectRef>
+          <a:fontRef idx="minor">
+            <a:schemeClr val="lt1"/>
+          </a:fontRef>
+        </p:style>
+        <p:txBody>
+          <a:bodyPr rtlCol="0" anchor="ctr"/>
+          <a:lstStyle/>
+          <a:p>
+            <a:pPr algn="ctr"/>
+          </a:p>
+        </p:txBody>
+      </p:sp>
       <p:pic>
         <p:nvPicPr>
-          <p:cNvPr id="16" name="Picture 15" descr="check_steel.png"/>
+          <p:cNvPr id="20" name="Picture 19" descr="check_white.png"/>
           <p:cNvPicPr>
             <a:picLocks noChangeAspect="1"/>
           </p:cNvPicPr>
@@ -12438,8 +12739,8 @@
         </p:blipFill>
         <p:spPr>
           <a:xfrm>
-            <a:off x="987552" y="4352544"/>
-            <a:ext cx="237744" cy="237744"/>
+            <a:off x="6523695" y="3588471"/>
+            <a:ext cx="266273" cy="266273"/>
           </a:xfrm>
           <a:prstGeom prst="rect">
             <a:avLst/>
@@ -12448,14 +12749,14 @@
       </p:pic>
       <p:sp>
         <p:nvSpPr>
-          <p:cNvPr id="17" name="TextBox 16"/>
+          <p:cNvPr id="21" name="TextBox 20"/>
           <p:cNvSpPr txBox="1"/>
           <p:nvPr/>
         </p:nvSpPr>
         <p:spPr>
           <a:xfrm>
-            <a:off x="1353312" y="4206240"/>
-            <a:ext cx="5029200" cy="530352"/>
+            <a:off x="7040880" y="3328416"/>
+            <a:ext cx="4206240" cy="786384"/>
           </a:xfrm>
           <a:prstGeom prst="rect">
             <a:avLst/>
@@ -12480,7 +12781,7 @@
               </a:spcAft>
             </a:pPr>
             <a:r>
-              <a:rPr sz="1200" b="0">
+              <a:rPr sz="1150" b="0">
                 <a:solidFill>
                   <a:srgbClr val="1A1A1A"/>
                 </a:solidFill>
@@ -12493,18 +12794,18 @@
       </p:sp>
       <p:sp>
         <p:nvSpPr>
-          <p:cNvPr id="18" name="Rounded Rectangle 17"/>
+          <p:cNvPr id="22" name="Rounded Rectangle 21"/>
           <p:cNvSpPr/>
           <p:nvPr/>
         </p:nvSpPr>
         <p:spPr>
           <a:xfrm>
-            <a:off x="841248" y="4809744"/>
-            <a:ext cx="5715000" cy="530352"/>
+            <a:off x="841248" y="4261104"/>
+            <a:ext cx="5138928" cy="786384"/>
           </a:xfrm>
           <a:prstGeom prst="roundRect">
             <a:avLst>
-              <a:gd name="adj" fmla="val 6000"/>
+              <a:gd name="adj" fmla="val 7000"/>
             </a:avLst>
           </a:prstGeom>
           <a:solidFill>
@@ -12539,9 +12840,55 @@
           </a:p>
         </p:txBody>
       </p:sp>
+      <p:sp>
+        <p:nvSpPr>
+          <p:cNvPr id="23" name="Rounded Rectangle 22"/>
+          <p:cNvSpPr/>
+          <p:nvPr/>
+        </p:nvSpPr>
+        <p:spPr>
+          <a:xfrm>
+            <a:off x="987552" y="4398264"/>
+            <a:ext cx="512064" cy="512064"/>
+          </a:xfrm>
+          <a:prstGeom prst="roundRect">
+            <a:avLst>
+              <a:gd name="adj" fmla="val 26000"/>
+            </a:avLst>
+          </a:prstGeom>
+          <a:solidFill>
+            <a:srgbClr val="EE0000"/>
+          </a:solidFill>
+          <a:ln>
+            <a:noFill/>
+          </a:ln>
+          <a:effectLst/>
+        </p:spPr>
+        <p:style>
+          <a:lnRef idx="1">
+            <a:schemeClr val="accent1"/>
+          </a:lnRef>
+          <a:fillRef idx="3">
+            <a:schemeClr val="accent1"/>
+          </a:fillRef>
+          <a:effectRef idx="2">
+            <a:schemeClr val="accent1"/>
+          </a:effectRef>
+          <a:fontRef idx="minor">
+            <a:schemeClr val="lt1"/>
+          </a:fontRef>
+        </p:style>
+        <p:txBody>
+          <a:bodyPr rtlCol="0" anchor="ctr"/>
+          <a:lstStyle/>
+          <a:p>
+            <a:pPr algn="ctr"/>
+          </a:p>
+        </p:txBody>
+      </p:sp>
       <p:pic>
         <p:nvPicPr>
-          <p:cNvPr id="19" name="Picture 18" descr="check_steel.png"/>
+          <p:cNvPr id="24" name="Picture 23" descr="check_white.png"/>
           <p:cNvPicPr>
             <a:picLocks noChangeAspect="1"/>
           </p:cNvPicPr>
@@ -12555,8 +12902,8 @@
         </p:blipFill>
         <p:spPr>
           <a:xfrm>
-            <a:off x="987552" y="4956048"/>
-            <a:ext cx="237744" cy="237744"/>
+            <a:off x="1110447" y="4521159"/>
+            <a:ext cx="266273" cy="266273"/>
           </a:xfrm>
           <a:prstGeom prst="rect">
             <a:avLst/>
@@ -12565,14 +12912,14 @@
       </p:pic>
       <p:sp>
         <p:nvSpPr>
-          <p:cNvPr id="20" name="TextBox 19"/>
+          <p:cNvPr id="25" name="TextBox 24"/>
           <p:cNvSpPr txBox="1"/>
           <p:nvPr/>
         </p:nvSpPr>
         <p:spPr>
           <a:xfrm>
-            <a:off x="1353312" y="4809744"/>
-            <a:ext cx="5029200" cy="530352"/>
+            <a:off x="1627632" y="4261104"/>
+            <a:ext cx="4206240" cy="786384"/>
           </a:xfrm>
           <a:prstGeom prst="rect">
             <a:avLst/>
@@ -12597,221 +12944,13 @@
               </a:spcAft>
             </a:pPr>
             <a:r>
-              <a:rPr sz="1200" b="0">
+              <a:rPr sz="1150" b="0">
                 <a:solidFill>
                   <a:srgbClr val="1A1A1A"/>
                 </a:solidFill>
                 <a:latin typeface="Red Hat Text"/>
               </a:rPr>
               <a:t>Three overlays for two settings = overkill</a:t>
-            </a:r>
-          </a:p>
-        </p:txBody>
-      </p:sp>
-      <p:sp>
-        <p:nvSpPr>
-          <p:cNvPr id="21" name="Rounded Rectangle 20"/>
-          <p:cNvSpPr/>
-          <p:nvPr/>
-        </p:nvSpPr>
-        <p:spPr>
-          <a:xfrm>
-            <a:off x="6812280" y="2395728"/>
-            <a:ext cx="4538167" cy="2944368"/>
-          </a:xfrm>
-          <a:prstGeom prst="roundRect">
-            <a:avLst>
-              <a:gd name="adj" fmla="val 4000"/>
-            </a:avLst>
-          </a:prstGeom>
-          <a:solidFill>
-            <a:srgbClr val="FFFFFF"/>
-          </a:solidFill>
-          <a:ln w="15240">
-            <a:solidFill>
-              <a:srgbClr val="DDE1E6"/>
-            </a:solidFill>
-          </a:ln>
-          <a:effectLst/>
-        </p:spPr>
-        <p:style>
-          <a:lnRef idx="1">
-            <a:schemeClr val="accent1"/>
-          </a:lnRef>
-          <a:fillRef idx="3">
-            <a:schemeClr val="accent1"/>
-          </a:fillRef>
-          <a:effectRef idx="2">
-            <a:schemeClr val="accent1"/>
-          </a:effectRef>
-          <a:fontRef idx="minor">
-            <a:schemeClr val="lt1"/>
-          </a:fontRef>
-        </p:style>
-        <p:txBody>
-          <a:bodyPr rtlCol="0" anchor="ctr"/>
-          <a:lstStyle/>
-          <a:p>
-            <a:pPr algn="ctr"/>
-          </a:p>
-        </p:txBody>
-      </p:sp>
-      <p:sp>
-        <p:nvSpPr>
-          <p:cNvPr id="22" name="Rounded Rectangle 21"/>
-          <p:cNvSpPr/>
-          <p:nvPr/>
-        </p:nvSpPr>
-        <p:spPr>
-          <a:xfrm>
-            <a:off x="7013448" y="2596896"/>
-            <a:ext cx="1298448" cy="310896"/>
-          </a:xfrm>
-          <a:prstGeom prst="roundRect">
-            <a:avLst>
-              <a:gd name="adj" fmla="val 50000"/>
-            </a:avLst>
-          </a:prstGeom>
-          <a:solidFill>
-            <a:srgbClr val="FCECEC"/>
-          </a:solidFill>
-          <a:ln>
-            <a:noFill/>
-          </a:ln>
-          <a:effectLst/>
-        </p:spPr>
-        <p:style>
-          <a:lnRef idx="1">
-            <a:schemeClr val="accent1"/>
-          </a:lnRef>
-          <a:fillRef idx="3">
-            <a:schemeClr val="accent1"/>
-          </a:fillRef>
-          <a:effectRef idx="2">
-            <a:schemeClr val="accent1"/>
-          </a:effectRef>
-          <a:fontRef idx="minor">
-            <a:schemeClr val="lt1"/>
-          </a:fontRef>
-        </p:style>
-        <p:txBody>
-          <a:bodyPr rtlCol="0" anchor="ctr"/>
-          <a:lstStyle/>
-          <a:p>
-            <a:pPr algn="ctr"/>
-          </a:p>
-        </p:txBody>
-      </p:sp>
-      <p:sp>
-        <p:nvSpPr>
-          <p:cNvPr id="23" name="TextBox 22"/>
-          <p:cNvSpPr txBox="1"/>
-          <p:nvPr/>
-        </p:nvSpPr>
-        <p:spPr>
-          <a:xfrm>
-            <a:off x="7013448" y="2596896"/>
-            <a:ext cx="1298448" cy="310896"/>
-          </a:xfrm>
-          <a:prstGeom prst="rect">
-            <a:avLst/>
-          </a:prstGeom>
-          <a:noFill/>
-        </p:spPr>
-        <p:txBody>
-          <a:bodyPr wrap="none" anchor="ctr" lIns="0" rIns="0" tIns="0" bIns="0">
-            <a:spAutoFit/>
-          </a:bodyPr>
-          <a:lstStyle/>
-          <a:p>
-            <a:pPr algn="ctr">
-              <a:lnSpc>
-                <a:spcPct val="106000"/>
-              </a:lnSpc>
-              <a:spcBef>
-                <a:spcPts val="0"/>
-              </a:spcBef>
-              <a:spcAft>
-                <a:spcPts val="0"/>
-              </a:spcAft>
-            </a:pPr>
-            <a:r>
-              <a:rPr sz="850" b="1">
-                <a:solidFill>
-                  <a:srgbClr val="B80000"/>
-                </a:solidFill>
-                <a:latin typeface="Red Hat Display"/>
-              </a:rPr>
-              <a:t>MEDIA PASS</a:t>
-            </a:r>
-          </a:p>
-        </p:txBody>
-      </p:sp>
-      <p:pic>
-        <p:nvPicPr>
-          <p:cNvPr id="24" name="Picture 23" descr="eye_slate.png"/>
-          <p:cNvPicPr>
-            <a:picLocks noChangeAspect="1"/>
-          </p:cNvPicPr>
-          <p:nvPr/>
-        </p:nvPicPr>
-        <p:blipFill>
-          <a:blip r:embed="rId4"/>
-          <a:stretch>
-            <a:fillRect/>
-          </a:stretch>
-        </p:blipFill>
-        <p:spPr>
-          <a:xfrm>
-            <a:off x="8843619" y="3108960"/>
-            <a:ext cx="475488" cy="475488"/>
-          </a:xfrm>
-          <a:prstGeom prst="rect">
-            <a:avLst/>
-          </a:prstGeom>
-        </p:spPr>
-      </p:pic>
-      <p:sp>
-        <p:nvSpPr>
-          <p:cNvPr id="25" name="TextBox 24"/>
-          <p:cNvSpPr txBox="1"/>
-          <p:nvPr/>
-        </p:nvSpPr>
-        <p:spPr>
-          <a:xfrm>
-            <a:off x="7050024" y="3721608"/>
-            <a:ext cx="4062679" cy="1481328"/>
-          </a:xfrm>
-          <a:prstGeom prst="rect">
-            <a:avLst/>
-          </a:prstGeom>
-          <a:noFill/>
-        </p:spPr>
-        <p:txBody>
-          <a:bodyPr wrap="square" anchor="t" lIns="0" rIns="0" tIns="0" bIns="0">
-            <a:spAutoFit/>
-          </a:bodyPr>
-          <a:lstStyle/>
-          <a:p>
-            <a:pPr algn="l">
-              <a:lnSpc>
-                <a:spcPct val="120000"/>
-              </a:lnSpc>
-              <a:spcBef>
-                <a:spcPts val="0"/>
-              </a:spcBef>
-              <a:spcAft>
-                <a:spcPts val="0"/>
-              </a:spcAft>
-            </a:pPr>
-            <a:r>
-              <a:rPr sz="950" b="0">
-                <a:solidFill>
-                  <a:srgbClr val="8A9099"/>
-                </a:solidFill>
-                <a:latin typeface="Red Hat Text"/>
-              </a:rPr>
-              <a:t>Two-column "externalize / keep it simple" decision card, with a small "base64 ≠ encryption" caution stamp.</a:t>
             </a:r>
           </a:p>
         </p:txBody>
